--- a/public/lessons/year-6-maths/summer/week-22/solve-one-step-equations/teaching-powerpoint-v1.pptx
+++ b/public/lessons/year-6-maths/summer/week-22/solve-one-step-equations/teaching-powerpoint-v1.pptx
@@ -2,24 +2,24 @@
 <file path=ppt/presentation.xml><?xml version="1.0" encoding="utf-8"?>
 <p:presentation xmlns:p="http://schemas.openxmlformats.org/presentationml/2006/main">
   <p:sldMasterIdLst>
-    <p:sldMasterId xmlns:r="http://schemas.openxmlformats.org/officeDocument/2006/relationships" id="2147483648" r:id="Rb76fea7f4491408a"/>
+    <p:sldMasterId xmlns:r="http://schemas.openxmlformats.org/officeDocument/2006/relationships" id="2147483648" r:id="Rb66f1e60cf004e77"/>
   </p:sldMasterIdLst>
   <p:notesMasterIdLst>
-    <p:notesMasterId xmlns:r="http://schemas.openxmlformats.org/officeDocument/2006/relationships" r:id="R8f9bc4df5a7e4726"/>
+    <p:notesMasterId xmlns:r="http://schemas.openxmlformats.org/officeDocument/2006/relationships" r:id="R5bad56fef7fd4a3c"/>
   </p:notesMasterIdLst>
   <p:sldIdLst>
-    <p:sldId xmlns:r="http://schemas.openxmlformats.org/officeDocument/2006/relationships" id="256" r:id="R2c243d609975442b"/>
-    <p:sldId xmlns:r="http://schemas.openxmlformats.org/officeDocument/2006/relationships" id="257" r:id="R58a5ae484b0f436e"/>
-    <p:sldId xmlns:r="http://schemas.openxmlformats.org/officeDocument/2006/relationships" id="258" r:id="R25b7bee3792f400a"/>
-    <p:sldId xmlns:r="http://schemas.openxmlformats.org/officeDocument/2006/relationships" id="259" r:id="R4ca3dcf9fa0640ed"/>
-    <p:sldId xmlns:r="http://schemas.openxmlformats.org/officeDocument/2006/relationships" id="260" r:id="Ra1eceb81b0804aee"/>
-    <p:sldId xmlns:r="http://schemas.openxmlformats.org/officeDocument/2006/relationships" id="261" r:id="R14e9ab1974e44ece"/>
-    <p:sldId xmlns:r="http://schemas.openxmlformats.org/officeDocument/2006/relationships" id="262" r:id="R3bc921ebaee74d70"/>
-    <p:sldId xmlns:r="http://schemas.openxmlformats.org/officeDocument/2006/relationships" id="263" r:id="R84a86b6438d14f7e"/>
-    <p:sldId xmlns:r="http://schemas.openxmlformats.org/officeDocument/2006/relationships" id="264" r:id="Raef09e23676844e2"/>
-    <p:sldId xmlns:r="http://schemas.openxmlformats.org/officeDocument/2006/relationships" id="265" r:id="Rce99cdee1bee43dd"/>
-    <p:sldId xmlns:r="http://schemas.openxmlformats.org/officeDocument/2006/relationships" id="266" r:id="R45596d7941f54f83"/>
-    <p:sldId xmlns:r="http://schemas.openxmlformats.org/officeDocument/2006/relationships" id="267" r:id="Rb03ac9478ce948b7"/>
+    <p:sldId xmlns:r="http://schemas.openxmlformats.org/officeDocument/2006/relationships" id="256" r:id="R0fc1325e595c439d"/>
+    <p:sldId xmlns:r="http://schemas.openxmlformats.org/officeDocument/2006/relationships" id="257" r:id="R24487cfc7fcf4a12"/>
+    <p:sldId xmlns:r="http://schemas.openxmlformats.org/officeDocument/2006/relationships" id="258" r:id="R35082ca55f3c4144"/>
+    <p:sldId xmlns:r="http://schemas.openxmlformats.org/officeDocument/2006/relationships" id="259" r:id="R97bc8c05cba24074"/>
+    <p:sldId xmlns:r="http://schemas.openxmlformats.org/officeDocument/2006/relationships" id="260" r:id="R6f4ec8e3f8f84614"/>
+    <p:sldId xmlns:r="http://schemas.openxmlformats.org/officeDocument/2006/relationships" id="261" r:id="Rf6a053f046014594"/>
+    <p:sldId xmlns:r="http://schemas.openxmlformats.org/officeDocument/2006/relationships" id="262" r:id="R7f88d5702d794514"/>
+    <p:sldId xmlns:r="http://schemas.openxmlformats.org/officeDocument/2006/relationships" id="263" r:id="Rb46d4fcf780f4661"/>
+    <p:sldId xmlns:r="http://schemas.openxmlformats.org/officeDocument/2006/relationships" id="264" r:id="R721ada3a32574d63"/>
+    <p:sldId xmlns:r="http://schemas.openxmlformats.org/officeDocument/2006/relationships" id="265" r:id="Rb3d01435131543f8"/>
+    <p:sldId xmlns:r="http://schemas.openxmlformats.org/officeDocument/2006/relationships" id="266" r:id="Rfab45f36413e4e54"/>
+    <p:sldId xmlns:r="http://schemas.openxmlformats.org/officeDocument/2006/relationships" id="267" r:id="Rea07747daf6c42c1"/>
   </p:sldIdLst>
   <p:sldSz cx="12192000" cy="6858000"/>
   <p:notesSz cx="6858000" cy="9144000"/>
@@ -873,7 +873,7 @@
           <a:lstStyle xmlns:a="http://schemas.openxmlformats.org/drawingml/2006/main"/>
           <a:p xmlns:a="http://schemas.openxmlformats.org/drawingml/2006/main">
             <a:r>
-              <a:t>I do. Reveal the question, setup and each calculation stage one click at a time. Pupils watch before copying. Model answer: x = 53.</a:t>
+              <a:t>I do. Reveal the question, then reveal each mathematical change one click at a time. Point to the numbers and operation that changed before moving to the next line. Final answer: x = 53.</a:t>
             </a:r>
           </a:p>
         </p:txBody>
@@ -1291,7 +1291,7 @@
   </p:cSld>
   <p:clrMap bg1="lt1" tx1="dk1" bg2="lt2" tx2="dk2" accent1="accent1" accent2="accent2" accent3="accent3" accent4="accent4" accent5="accent5" accent6="accent6" hlink="hlink" folHlink="folHlink"/>
   <p:sldLayoutIdLst>
-    <p:sldLayoutId xmlns:r="http://schemas.openxmlformats.org/officeDocument/2006/relationships" id="2147483649" r:id="R5051fa8c76f74230"/>
+    <p:sldLayoutId xmlns:r="http://schemas.openxmlformats.org/officeDocument/2006/relationships" id="2147483649" r:id="Rf2a5b7cb6f064dc8"/>
   </p:sldLayoutIdLst>
   <p:txStyles>
     <p:titleStyle>
@@ -1842,7 +1842,7 @@
           <p:cNvPr id="12" name="">
             <a:extLst xmlns:a="http://schemas.openxmlformats.org/drawingml/2006/main">
               <a:ext uri="{FF2B5EF4-FFF2-40B4-BE49-F238E27FC236}">
-                <a16:creationId xmlns:a16="http://schemas.microsoft.com/office/drawing/2014/main" id="{198647B8-FCE9-4B88-8965-02C1131E7788}"/>
+                <a16:creationId xmlns:a16="http://schemas.microsoft.com/office/drawing/2014/main" id="{5E45ED12-3112-4652-91AD-59E14D4C037C}"/>
               </a:ext>
             </a:extLst>
           </p:cNvPr>
@@ -1874,7 +1874,7 @@
           <p:cNvPr id="2" name="">
             <a:extLst xmlns:a="http://schemas.openxmlformats.org/drawingml/2006/main">
               <a:ext uri="{FF2B5EF4-FFF2-40B4-BE49-F238E27FC236}">
-                <a16:creationId xmlns:a16="http://schemas.microsoft.com/office/drawing/2014/main" id="{6E8ACB1D-AC22-4CE6-9688-980FEA88915A}"/>
+                <a16:creationId xmlns:a16="http://schemas.microsoft.com/office/drawing/2014/main" id="{CDA95E36-88AE-407A-8F8C-2D54CC88CDD8}"/>
               </a:ext>
             </a:extLst>
           </p:cNvPr>
@@ -1931,7 +1931,7 @@
           <p:cNvPr id="3" name="">
             <a:extLst xmlns:a="http://schemas.openxmlformats.org/drawingml/2006/main">
               <a:ext uri="{FF2B5EF4-FFF2-40B4-BE49-F238E27FC236}">
-                <a16:creationId xmlns:a16="http://schemas.microsoft.com/office/drawing/2014/main" id="{9EDF5345-BB68-4590-8278-9165BA03425E}"/>
+                <a16:creationId xmlns:a16="http://schemas.microsoft.com/office/drawing/2014/main" id="{810139F8-65F0-410A-9571-C83EF4CDDD8B}"/>
               </a:ext>
             </a:extLst>
           </p:cNvPr>
@@ -1965,7 +1965,7 @@
           <p:cNvPr id="4" name="">
             <a:extLst xmlns:a="http://schemas.openxmlformats.org/drawingml/2006/main">
               <a:ext uri="{FF2B5EF4-FFF2-40B4-BE49-F238E27FC236}">
-                <a16:creationId xmlns:a16="http://schemas.microsoft.com/office/drawing/2014/main" id="{2AD2E0F5-CF00-4EE8-B803-AB3F7F62A66F}"/>
+                <a16:creationId xmlns:a16="http://schemas.microsoft.com/office/drawing/2014/main" id="{3DFC100A-40DA-4A1C-90AE-AC85DF3DA5DB}"/>
               </a:ext>
             </a:extLst>
           </p:cNvPr>
@@ -2022,7 +2022,7 @@
           <p:cNvPr id="5" name="">
             <a:extLst xmlns:a="http://schemas.openxmlformats.org/drawingml/2006/main">
               <a:ext uri="{FF2B5EF4-FFF2-40B4-BE49-F238E27FC236}">
-                <a16:creationId xmlns:a16="http://schemas.microsoft.com/office/drawing/2014/main" id="{CB8393BB-0DED-441F-BE06-3436C8284787}"/>
+                <a16:creationId xmlns:a16="http://schemas.microsoft.com/office/drawing/2014/main" id="{57B2F74A-3224-47CE-A9B3-877632393047}"/>
               </a:ext>
             </a:extLst>
           </p:cNvPr>
@@ -2079,7 +2079,7 @@
           <p:cNvPr id="6" name="">
             <a:extLst xmlns:a="http://schemas.openxmlformats.org/drawingml/2006/main">
               <a:ext uri="{FF2B5EF4-FFF2-40B4-BE49-F238E27FC236}">
-                <a16:creationId xmlns:a16="http://schemas.microsoft.com/office/drawing/2014/main" id="{86A1A1F9-42AA-4D46-BF5C-E831F38A6092}"/>
+                <a16:creationId xmlns:a16="http://schemas.microsoft.com/office/drawing/2014/main" id="{1662A0A0-A511-4845-A23B-464E9247FE20}"/>
               </a:ext>
             </a:extLst>
           </p:cNvPr>
@@ -2113,7 +2113,7 @@
           <p:cNvPr id="7" name="">
             <a:extLst xmlns:a="http://schemas.openxmlformats.org/drawingml/2006/main">
               <a:ext uri="{FF2B5EF4-FFF2-40B4-BE49-F238E27FC236}">
-                <a16:creationId xmlns:a16="http://schemas.microsoft.com/office/drawing/2014/main" id="{F092D118-8414-40E2-B0DE-A6F148962AA5}"/>
+                <a16:creationId xmlns:a16="http://schemas.microsoft.com/office/drawing/2014/main" id="{EAF2D162-903A-48C1-9674-1CC7A30D8174}"/>
               </a:ext>
             </a:extLst>
           </p:cNvPr>
@@ -2170,7 +2170,7 @@
           <p:cNvPr id="8" name="">
             <a:extLst xmlns:a="http://schemas.openxmlformats.org/drawingml/2006/main">
               <a:ext uri="{FF2B5EF4-FFF2-40B4-BE49-F238E27FC236}">
-                <a16:creationId xmlns:a16="http://schemas.microsoft.com/office/drawing/2014/main" id="{DA76B8D4-C914-44F9-ABF6-5B416A259C3B}"/>
+                <a16:creationId xmlns:a16="http://schemas.microsoft.com/office/drawing/2014/main" id="{28D9A3DC-52DB-4A43-B09E-6FF1A68B4588}"/>
               </a:ext>
             </a:extLst>
           </p:cNvPr>
@@ -2227,7 +2227,7 @@
           <p:cNvPr id="9" name="">
             <a:extLst xmlns:a="http://schemas.openxmlformats.org/drawingml/2006/main">
               <a:ext uri="{FF2B5EF4-FFF2-40B4-BE49-F238E27FC236}">
-                <a16:creationId xmlns:a16="http://schemas.microsoft.com/office/drawing/2014/main" id="{07EFF1DC-0562-432F-B74F-5B992C32E269}"/>
+                <a16:creationId xmlns:a16="http://schemas.microsoft.com/office/drawing/2014/main" id="{694DDE83-31D3-4B3D-B4C7-A7B768906E1A}"/>
               </a:ext>
             </a:extLst>
           </p:cNvPr>
@@ -2284,7 +2284,7 @@
           <p:cNvPr id="10" name="">
             <a:extLst xmlns:a="http://schemas.openxmlformats.org/drawingml/2006/main">
               <a:ext uri="{FF2B5EF4-FFF2-40B4-BE49-F238E27FC236}">
-                <a16:creationId xmlns:a16="http://schemas.microsoft.com/office/drawing/2014/main" id="{101B5242-D986-4947-9745-4AEDF0061CD5}"/>
+                <a16:creationId xmlns:a16="http://schemas.microsoft.com/office/drawing/2014/main" id="{D3278C01-5056-4A38-B7AD-1EF09A6C0BDD}"/>
               </a:ext>
             </a:extLst>
           </p:cNvPr>
@@ -2341,7 +2341,7 @@
           <p:cNvPr id="11" name="">
             <a:extLst xmlns:a="http://schemas.openxmlformats.org/drawingml/2006/main">
               <a:ext uri="{FF2B5EF4-FFF2-40B4-BE49-F238E27FC236}">
-                <a16:creationId xmlns:a16="http://schemas.microsoft.com/office/drawing/2014/main" id="{4E22E97B-202B-40BA-916F-9A810A8D0BF7}"/>
+                <a16:creationId xmlns:a16="http://schemas.microsoft.com/office/drawing/2014/main" id="{AC8E2992-E3F2-4A8C-8BA5-5FC000BCA9AF}"/>
               </a:ext>
             </a:extLst>
           </p:cNvPr>
@@ -2396,7 +2396,7 @@
     </p:spTree>
     <p:extLst>
       <p:ext uri="{BB962C8B-B14F-4D97-AF65-F5344CB8AC3E}">
-        <p14:creationId xmlns:p14="http://schemas.microsoft.com/office/powerpoint/2010/main" val="1241639597"/>
+        <p14:creationId xmlns:p14="http://schemas.microsoft.com/office/powerpoint/2010/main" val="1190786921"/>
       </p:ext>
     </p:extLst>
   </p:cSld>
@@ -2427,7 +2427,7 @@
           <p:cNvPr id="14" name="">
             <a:extLst xmlns:a="http://schemas.openxmlformats.org/drawingml/2006/main">
               <a:ext uri="{FF2B5EF4-FFF2-40B4-BE49-F238E27FC236}">
-                <a16:creationId xmlns:a16="http://schemas.microsoft.com/office/drawing/2014/main" id="{B8D66EEE-4310-4EB8-823F-986ED819A78E}"/>
+                <a16:creationId xmlns:a16="http://schemas.microsoft.com/office/drawing/2014/main" id="{87E3D76C-744D-4273-A953-06BD285A2C16}"/>
               </a:ext>
             </a:extLst>
           </p:cNvPr>
@@ -2459,7 +2459,7 @@
           <p:cNvPr id="2" name="">
             <a:extLst xmlns:a="http://schemas.openxmlformats.org/drawingml/2006/main">
               <a:ext uri="{FF2B5EF4-FFF2-40B4-BE49-F238E27FC236}">
-                <a16:creationId xmlns:a16="http://schemas.microsoft.com/office/drawing/2014/main" id="{1988C72A-01DB-4F10-8BBF-ED5B2A2F04C0}"/>
+                <a16:creationId xmlns:a16="http://schemas.microsoft.com/office/drawing/2014/main" id="{8AAE22E9-9C37-4DA8-B476-417E2C7558C1}"/>
               </a:ext>
             </a:extLst>
           </p:cNvPr>
@@ -2516,7 +2516,7 @@
           <p:cNvPr id="3" name="">
             <a:extLst xmlns:a="http://schemas.openxmlformats.org/drawingml/2006/main">
               <a:ext uri="{FF2B5EF4-FFF2-40B4-BE49-F238E27FC236}">
-                <a16:creationId xmlns:a16="http://schemas.microsoft.com/office/drawing/2014/main" id="{5965468C-D770-40AA-90EA-410C2E206500}"/>
+                <a16:creationId xmlns:a16="http://schemas.microsoft.com/office/drawing/2014/main" id="{4D696667-6903-4CC0-9BA9-127EFCCE7E57}"/>
               </a:ext>
             </a:extLst>
           </p:cNvPr>
@@ -2548,7 +2548,7 @@
           <p:cNvPr id="4" name="">
             <a:extLst xmlns:a="http://schemas.openxmlformats.org/drawingml/2006/main">
               <a:ext uri="{FF2B5EF4-FFF2-40B4-BE49-F238E27FC236}">
-                <a16:creationId xmlns:a16="http://schemas.microsoft.com/office/drawing/2014/main" id="{C9E4F6BD-2179-4AC9-B115-57CBCB7DC0CE}"/>
+                <a16:creationId xmlns:a16="http://schemas.microsoft.com/office/drawing/2014/main" id="{AE4EFFB3-E03C-4168-A118-A99D8B942539}"/>
               </a:ext>
             </a:extLst>
           </p:cNvPr>
@@ -2605,7 +2605,7 @@
           <p:cNvPr id="5" name="">
             <a:extLst xmlns:a="http://schemas.openxmlformats.org/drawingml/2006/main">
               <a:ext uri="{FF2B5EF4-FFF2-40B4-BE49-F238E27FC236}">
-                <a16:creationId xmlns:a16="http://schemas.microsoft.com/office/drawing/2014/main" id="{C3918260-A581-4F54-8381-FC753A1D0858}"/>
+                <a16:creationId xmlns:a16="http://schemas.microsoft.com/office/drawing/2014/main" id="{B2B23DBC-9E05-43CB-B125-E4D9374E70AB}"/>
               </a:ext>
             </a:extLst>
           </p:cNvPr>
@@ -2662,7 +2662,7 @@
           <p:cNvPr id="6" name="">
             <a:extLst xmlns:a="http://schemas.openxmlformats.org/drawingml/2006/main">
               <a:ext uri="{FF2B5EF4-FFF2-40B4-BE49-F238E27FC236}">
-                <a16:creationId xmlns:a16="http://schemas.microsoft.com/office/drawing/2014/main" id="{0F35D154-2E10-42E6-BF4E-4EF4269C7DBD}"/>
+                <a16:creationId xmlns:a16="http://schemas.microsoft.com/office/drawing/2014/main" id="{6175D3ED-F337-4862-BAB9-C9B153E36B73}"/>
               </a:ext>
             </a:extLst>
           </p:cNvPr>
@@ -2719,7 +2719,7 @@
           <p:cNvPr id="7" name="">
             <a:extLst xmlns:a="http://schemas.openxmlformats.org/drawingml/2006/main">
               <a:ext uri="{FF2B5EF4-FFF2-40B4-BE49-F238E27FC236}">
-                <a16:creationId xmlns:a16="http://schemas.microsoft.com/office/drawing/2014/main" id="{C702B6E1-1982-4001-9A19-D145D2790A9D}"/>
+                <a16:creationId xmlns:a16="http://schemas.microsoft.com/office/drawing/2014/main" id="{D9D2B5AE-9BEC-4993-9FED-506EEADC6FCE}"/>
               </a:ext>
             </a:extLst>
           </p:cNvPr>
@@ -2751,7 +2751,7 @@
           <p:cNvPr id="8" name="">
             <a:extLst xmlns:a="http://schemas.openxmlformats.org/drawingml/2006/main">
               <a:ext uri="{FF2B5EF4-FFF2-40B4-BE49-F238E27FC236}">
-                <a16:creationId xmlns:a16="http://schemas.microsoft.com/office/drawing/2014/main" id="{AD586CFC-1438-4FBF-80DB-348DC3F2FFB4}"/>
+                <a16:creationId xmlns:a16="http://schemas.microsoft.com/office/drawing/2014/main" id="{A44EB319-2617-4E7C-ADF1-FC8B86743D72}"/>
               </a:ext>
             </a:extLst>
           </p:cNvPr>
@@ -2808,7 +2808,7 @@
           <p:cNvPr id="9" name="">
             <a:extLst xmlns:a="http://schemas.openxmlformats.org/drawingml/2006/main">
               <a:ext uri="{FF2B5EF4-FFF2-40B4-BE49-F238E27FC236}">
-                <a16:creationId xmlns:a16="http://schemas.microsoft.com/office/drawing/2014/main" id="{8B371520-7871-4E50-8EC1-C22F591F170F}"/>
+                <a16:creationId xmlns:a16="http://schemas.microsoft.com/office/drawing/2014/main" id="{BDE9DEF8-EA42-48B4-A967-9BF23D3D2D25}"/>
               </a:ext>
             </a:extLst>
           </p:cNvPr>
@@ -2865,7 +2865,7 @@
           <p:cNvPr id="10" name="">
             <a:extLst xmlns:a="http://schemas.openxmlformats.org/drawingml/2006/main">
               <a:ext uri="{FF2B5EF4-FFF2-40B4-BE49-F238E27FC236}">
-                <a16:creationId xmlns:a16="http://schemas.microsoft.com/office/drawing/2014/main" id="{71EBCEF2-E5CF-4341-AC45-F983A709A534}"/>
+                <a16:creationId xmlns:a16="http://schemas.microsoft.com/office/drawing/2014/main" id="{5F62953D-A226-431B-8D6A-8B3102803DA6}"/>
               </a:ext>
             </a:extLst>
           </p:cNvPr>
@@ -2922,7 +2922,7 @@
           <p:cNvPr id="11" name="">
             <a:extLst xmlns:a="http://schemas.openxmlformats.org/drawingml/2006/main">
               <a:ext uri="{FF2B5EF4-FFF2-40B4-BE49-F238E27FC236}">
-                <a16:creationId xmlns:a16="http://schemas.microsoft.com/office/drawing/2014/main" id="{C7383A09-029B-492B-996B-FD134F6853A2}"/>
+                <a16:creationId xmlns:a16="http://schemas.microsoft.com/office/drawing/2014/main" id="{F062FDFC-CB8A-485C-A074-4FAFC303EA91}"/>
               </a:ext>
             </a:extLst>
           </p:cNvPr>
@@ -2979,7 +2979,7 @@
           <p:cNvPr id="12" name="">
             <a:extLst xmlns:a="http://schemas.openxmlformats.org/drawingml/2006/main">
               <a:ext uri="{FF2B5EF4-FFF2-40B4-BE49-F238E27FC236}">
-                <a16:creationId xmlns:a16="http://schemas.microsoft.com/office/drawing/2014/main" id="{F4ED2086-4208-42B9-9BC8-B41A6950DEAD}"/>
+                <a16:creationId xmlns:a16="http://schemas.microsoft.com/office/drawing/2014/main" id="{7034939A-9902-4DE4-B438-E7C4F22EC111}"/>
               </a:ext>
             </a:extLst>
           </p:cNvPr>
@@ -3036,7 +3036,7 @@
           <p:cNvPr id="13" name="">
             <a:extLst xmlns:a="http://schemas.openxmlformats.org/drawingml/2006/main">
               <a:ext uri="{FF2B5EF4-FFF2-40B4-BE49-F238E27FC236}">
-                <a16:creationId xmlns:a16="http://schemas.microsoft.com/office/drawing/2014/main" id="{8C71DE5E-88A5-4046-AD89-5C5A51A34871}"/>
+                <a16:creationId xmlns:a16="http://schemas.microsoft.com/office/drawing/2014/main" id="{2F77018A-AB56-4EB3-AB27-E72F409452DA}"/>
               </a:ext>
             </a:extLst>
           </p:cNvPr>
@@ -3091,7 +3091,7 @@
     </p:spTree>
     <p:extLst>
       <p:ext uri="{BB962C8B-B14F-4D97-AF65-F5344CB8AC3E}">
-        <p14:creationId xmlns:p14="http://schemas.microsoft.com/office/powerpoint/2010/main" val="1420830973"/>
+        <p14:creationId xmlns:p14="http://schemas.microsoft.com/office/powerpoint/2010/main" val="46252086"/>
       </p:ext>
     </p:extLst>
   </p:cSld>
@@ -3292,7 +3292,7 @@
           <p:cNvPr id="19" name="">
             <a:extLst xmlns:a="http://schemas.openxmlformats.org/drawingml/2006/main">
               <a:ext uri="{FF2B5EF4-FFF2-40B4-BE49-F238E27FC236}">
-                <a16:creationId xmlns:a16="http://schemas.microsoft.com/office/drawing/2014/main" id="{29DB8F66-50D4-49E6-88E7-713A1D2C501D}"/>
+                <a16:creationId xmlns:a16="http://schemas.microsoft.com/office/drawing/2014/main" id="{1EA74355-AFA6-4066-9A16-9FA76D97F416}"/>
               </a:ext>
             </a:extLst>
           </p:cNvPr>
@@ -3324,7 +3324,7 @@
           <p:cNvPr id="2" name="">
             <a:extLst xmlns:a="http://schemas.openxmlformats.org/drawingml/2006/main">
               <a:ext uri="{FF2B5EF4-FFF2-40B4-BE49-F238E27FC236}">
-                <a16:creationId xmlns:a16="http://schemas.microsoft.com/office/drawing/2014/main" id="{1BEAB2C7-352F-4AB8-BF2C-21D92D7EB705}"/>
+                <a16:creationId xmlns:a16="http://schemas.microsoft.com/office/drawing/2014/main" id="{47627A80-C6D4-452C-8F0E-1F9621CA1B88}"/>
               </a:ext>
             </a:extLst>
           </p:cNvPr>
@@ -3381,7 +3381,7 @@
           <p:cNvPr id="3" name="">
             <a:extLst xmlns:a="http://schemas.openxmlformats.org/drawingml/2006/main">
               <a:ext uri="{FF2B5EF4-FFF2-40B4-BE49-F238E27FC236}">
-                <a16:creationId xmlns:a16="http://schemas.microsoft.com/office/drawing/2014/main" id="{8226A7F1-D067-4A51-9723-0CE6B6BA4362}"/>
+                <a16:creationId xmlns:a16="http://schemas.microsoft.com/office/drawing/2014/main" id="{8525BA3F-1B17-4DE5-B2E0-42FA1FC7F2BA}"/>
               </a:ext>
             </a:extLst>
           </p:cNvPr>
@@ -3413,7 +3413,7 @@
           <p:cNvPr id="4" name="">
             <a:extLst xmlns:a="http://schemas.openxmlformats.org/drawingml/2006/main">
               <a:ext uri="{FF2B5EF4-FFF2-40B4-BE49-F238E27FC236}">
-                <a16:creationId xmlns:a16="http://schemas.microsoft.com/office/drawing/2014/main" id="{7214C8C2-8C5F-4EA6-B2D3-1EC1AAA4FF66}"/>
+                <a16:creationId xmlns:a16="http://schemas.microsoft.com/office/drawing/2014/main" id="{F66B3442-2270-476E-BD44-79866514CFBA}"/>
               </a:ext>
             </a:extLst>
           </p:cNvPr>
@@ -3470,7 +3470,7 @@
           <p:cNvPr id="5" name="">
             <a:extLst xmlns:a="http://schemas.openxmlformats.org/drawingml/2006/main">
               <a:ext uri="{FF2B5EF4-FFF2-40B4-BE49-F238E27FC236}">
-                <a16:creationId xmlns:a16="http://schemas.microsoft.com/office/drawing/2014/main" id="{0EF4E0E2-DECE-40AB-8AB6-A9E75CFAE01E}"/>
+                <a16:creationId xmlns:a16="http://schemas.microsoft.com/office/drawing/2014/main" id="{BFAE3575-7280-4060-8F2C-5B7F7B40C565}"/>
               </a:ext>
             </a:extLst>
           </p:cNvPr>
@@ -3527,7 +3527,7 @@
           <p:cNvPr id="6" name="">
             <a:extLst xmlns:a="http://schemas.openxmlformats.org/drawingml/2006/main">
               <a:ext uri="{FF2B5EF4-FFF2-40B4-BE49-F238E27FC236}">
-                <a16:creationId xmlns:a16="http://schemas.microsoft.com/office/drawing/2014/main" id="{35F1DADA-7105-4841-8BEE-BA4106880CF5}"/>
+                <a16:creationId xmlns:a16="http://schemas.microsoft.com/office/drawing/2014/main" id="{2DE7621E-B2E1-4DB1-A99C-6AE4C2C9545F}"/>
               </a:ext>
             </a:extLst>
           </p:cNvPr>
@@ -3584,7 +3584,7 @@
           <p:cNvPr id="7" name="">
             <a:extLst xmlns:a="http://schemas.openxmlformats.org/drawingml/2006/main">
               <a:ext uri="{FF2B5EF4-FFF2-40B4-BE49-F238E27FC236}">
-                <a16:creationId xmlns:a16="http://schemas.microsoft.com/office/drawing/2014/main" id="{E9876CF2-17B3-4421-A44A-A22C0291274C}"/>
+                <a16:creationId xmlns:a16="http://schemas.microsoft.com/office/drawing/2014/main" id="{098B73CB-B3BE-4295-AA73-CAE6E803B42B}"/>
               </a:ext>
             </a:extLst>
           </p:cNvPr>
@@ -3616,7 +3616,7 @@
           <p:cNvPr id="8" name="">
             <a:extLst xmlns:a="http://schemas.openxmlformats.org/drawingml/2006/main">
               <a:ext uri="{FF2B5EF4-FFF2-40B4-BE49-F238E27FC236}">
-                <a16:creationId xmlns:a16="http://schemas.microsoft.com/office/drawing/2014/main" id="{DB30BC3E-6605-423F-89E1-9DD737FCFD65}"/>
+                <a16:creationId xmlns:a16="http://schemas.microsoft.com/office/drawing/2014/main" id="{504C307F-C763-4579-8799-BED1B579D9A2}"/>
               </a:ext>
             </a:extLst>
           </p:cNvPr>
@@ -3673,7 +3673,7 @@
           <p:cNvPr id="9" name="">
             <a:extLst xmlns:a="http://schemas.openxmlformats.org/drawingml/2006/main">
               <a:ext uri="{FF2B5EF4-FFF2-40B4-BE49-F238E27FC236}">
-                <a16:creationId xmlns:a16="http://schemas.microsoft.com/office/drawing/2014/main" id="{697CF746-B2AF-493D-91B5-CBFFE9231841}"/>
+                <a16:creationId xmlns:a16="http://schemas.microsoft.com/office/drawing/2014/main" id="{6E6A8D61-0BF7-4237-BC7E-56CAE55A6AF9}"/>
               </a:ext>
             </a:extLst>
           </p:cNvPr>
@@ -3730,7 +3730,7 @@
           <p:cNvPr id="10" name="">
             <a:extLst xmlns:a="http://schemas.openxmlformats.org/drawingml/2006/main">
               <a:ext uri="{FF2B5EF4-FFF2-40B4-BE49-F238E27FC236}">
-                <a16:creationId xmlns:a16="http://schemas.microsoft.com/office/drawing/2014/main" id="{C8CB4A67-77EA-4BCB-84DC-91949B92DDBE}"/>
+                <a16:creationId xmlns:a16="http://schemas.microsoft.com/office/drawing/2014/main" id="{DAB669C1-F045-47FB-8FF0-F1A53310C1CD}"/>
               </a:ext>
             </a:extLst>
           </p:cNvPr>
@@ -3787,7 +3787,7 @@
           <p:cNvPr id="11" name="">
             <a:extLst xmlns:a="http://schemas.openxmlformats.org/drawingml/2006/main">
               <a:ext uri="{FF2B5EF4-FFF2-40B4-BE49-F238E27FC236}">
-                <a16:creationId xmlns:a16="http://schemas.microsoft.com/office/drawing/2014/main" id="{337BCDAD-612D-489D-BA44-1E130BE8C185}"/>
+                <a16:creationId xmlns:a16="http://schemas.microsoft.com/office/drawing/2014/main" id="{282CD5CF-187A-4786-8283-F79CB900D08A}"/>
               </a:ext>
             </a:extLst>
           </p:cNvPr>
@@ -3821,7 +3821,7 @@
           <p:cNvPr id="12" name="">
             <a:extLst xmlns:a="http://schemas.openxmlformats.org/drawingml/2006/main">
               <a:ext uri="{FF2B5EF4-FFF2-40B4-BE49-F238E27FC236}">
-                <a16:creationId xmlns:a16="http://schemas.microsoft.com/office/drawing/2014/main" id="{37067041-A990-4954-8DE5-72CDF59BB84C}"/>
+                <a16:creationId xmlns:a16="http://schemas.microsoft.com/office/drawing/2014/main" id="{F9A74066-F74B-4AA6-BF7F-50F09D2E6784}"/>
               </a:ext>
             </a:extLst>
           </p:cNvPr>
@@ -3878,7 +3878,7 @@
           <p:cNvPr id="13" name="">
             <a:extLst xmlns:a="http://schemas.openxmlformats.org/drawingml/2006/main">
               <a:ext uri="{FF2B5EF4-FFF2-40B4-BE49-F238E27FC236}">
-                <a16:creationId xmlns:a16="http://schemas.microsoft.com/office/drawing/2014/main" id="{B9E24D9C-7B03-44BE-84E5-8452501CAF78}"/>
+                <a16:creationId xmlns:a16="http://schemas.microsoft.com/office/drawing/2014/main" id="{5BDA6F0C-6D8E-4BA8-8500-2786B0CBE702}"/>
               </a:ext>
             </a:extLst>
           </p:cNvPr>
@@ -3935,7 +3935,7 @@
           <p:cNvPr id="14" name="">
             <a:extLst xmlns:a="http://schemas.openxmlformats.org/drawingml/2006/main">
               <a:ext uri="{FF2B5EF4-FFF2-40B4-BE49-F238E27FC236}">
-                <a16:creationId xmlns:a16="http://schemas.microsoft.com/office/drawing/2014/main" id="{206DA4D3-D4F6-489C-B3B3-BE74C50B72C1}"/>
+                <a16:creationId xmlns:a16="http://schemas.microsoft.com/office/drawing/2014/main" id="{F07C7866-22EB-463C-94AD-7B45763E5FE2}"/>
               </a:ext>
             </a:extLst>
           </p:cNvPr>
@@ -3992,7 +3992,7 @@
           <p:cNvPr id="15" name="">
             <a:extLst xmlns:a="http://schemas.openxmlformats.org/drawingml/2006/main">
               <a:ext uri="{FF2B5EF4-FFF2-40B4-BE49-F238E27FC236}">
-                <a16:creationId xmlns:a16="http://schemas.microsoft.com/office/drawing/2014/main" id="{56C66A55-D362-4A96-BEFC-FE5ABFDEA7F4}"/>
+                <a16:creationId xmlns:a16="http://schemas.microsoft.com/office/drawing/2014/main" id="{FBF3328A-D19A-4F56-9AD1-62E261495746}"/>
               </a:ext>
             </a:extLst>
           </p:cNvPr>
@@ -4026,7 +4026,7 @@
           <p:cNvPr id="16" name="">
             <a:extLst xmlns:a="http://schemas.openxmlformats.org/drawingml/2006/main">
               <a:ext uri="{FF2B5EF4-FFF2-40B4-BE49-F238E27FC236}">
-                <a16:creationId xmlns:a16="http://schemas.microsoft.com/office/drawing/2014/main" id="{35CC6060-232F-424C-9429-95EC8672F39E}"/>
+                <a16:creationId xmlns:a16="http://schemas.microsoft.com/office/drawing/2014/main" id="{2B0D327E-5002-4C69-94CD-48773809698B}"/>
               </a:ext>
             </a:extLst>
           </p:cNvPr>
@@ -4083,7 +4083,7 @@
           <p:cNvPr id="17" name="">
             <a:extLst xmlns:a="http://schemas.openxmlformats.org/drawingml/2006/main">
               <a:ext uri="{FF2B5EF4-FFF2-40B4-BE49-F238E27FC236}">
-                <a16:creationId xmlns:a16="http://schemas.microsoft.com/office/drawing/2014/main" id="{AECE6576-5C1C-432A-A093-E6E89CB343AC}"/>
+                <a16:creationId xmlns:a16="http://schemas.microsoft.com/office/drawing/2014/main" id="{10434F1D-A643-49FD-940B-88BF67359303}"/>
               </a:ext>
             </a:extLst>
           </p:cNvPr>
@@ -4140,7 +4140,7 @@
           <p:cNvPr id="18" name="">
             <a:extLst xmlns:a="http://schemas.openxmlformats.org/drawingml/2006/main">
               <a:ext uri="{FF2B5EF4-FFF2-40B4-BE49-F238E27FC236}">
-                <a16:creationId xmlns:a16="http://schemas.microsoft.com/office/drawing/2014/main" id="{19B42C4C-7FC4-4756-BEBE-60EA46007D6F}"/>
+                <a16:creationId xmlns:a16="http://schemas.microsoft.com/office/drawing/2014/main" id="{A68009F4-ADF4-4BF1-B43E-7BA96165D5E2}"/>
               </a:ext>
             </a:extLst>
           </p:cNvPr>
@@ -4195,7 +4195,7 @@
     </p:spTree>
     <p:extLst>
       <p:ext uri="{BB962C8B-B14F-4D97-AF65-F5344CB8AC3E}">
-        <p14:creationId xmlns:p14="http://schemas.microsoft.com/office/powerpoint/2010/main" val="1898532684"/>
+        <p14:creationId xmlns:p14="http://schemas.microsoft.com/office/powerpoint/2010/main" val="1033209209"/>
       </p:ext>
     </p:extLst>
   </p:cSld>
@@ -4350,7 +4350,7 @@
           <p:cNvPr id="23" name="">
             <a:extLst xmlns:a="http://schemas.openxmlformats.org/drawingml/2006/main">
               <a:ext uri="{FF2B5EF4-FFF2-40B4-BE49-F238E27FC236}">
-                <a16:creationId xmlns:a16="http://schemas.microsoft.com/office/drawing/2014/main" id="{0D986D2A-BDC0-475F-98B0-4846CD600A91}"/>
+                <a16:creationId xmlns:a16="http://schemas.microsoft.com/office/drawing/2014/main" id="{DDE5D7A7-3391-4CD0-BD64-A5C688C949EC}"/>
               </a:ext>
             </a:extLst>
           </p:cNvPr>
@@ -4382,7 +4382,7 @@
           <p:cNvPr id="2" name="">
             <a:extLst xmlns:a="http://schemas.openxmlformats.org/drawingml/2006/main">
               <a:ext uri="{FF2B5EF4-FFF2-40B4-BE49-F238E27FC236}">
-                <a16:creationId xmlns:a16="http://schemas.microsoft.com/office/drawing/2014/main" id="{39718C03-0787-486A-AB53-03A76E52ECAA}"/>
+                <a16:creationId xmlns:a16="http://schemas.microsoft.com/office/drawing/2014/main" id="{AFB3A72B-E8DC-4244-8EAC-461B0443ED00}"/>
               </a:ext>
             </a:extLst>
           </p:cNvPr>
@@ -4439,7 +4439,7 @@
           <p:cNvPr id="3" name="">
             <a:extLst xmlns:a="http://schemas.openxmlformats.org/drawingml/2006/main">
               <a:ext uri="{FF2B5EF4-FFF2-40B4-BE49-F238E27FC236}">
-                <a16:creationId xmlns:a16="http://schemas.microsoft.com/office/drawing/2014/main" id="{BCD51FA3-B8D3-4B94-A180-C8C53DE1503F}"/>
+                <a16:creationId xmlns:a16="http://schemas.microsoft.com/office/drawing/2014/main" id="{DBFF1089-9382-4BD4-8E31-9EE064088734}"/>
               </a:ext>
             </a:extLst>
           </p:cNvPr>
@@ -4471,7 +4471,7 @@
           <p:cNvPr id="4" name="">
             <a:extLst xmlns:a="http://schemas.openxmlformats.org/drawingml/2006/main">
               <a:ext uri="{FF2B5EF4-FFF2-40B4-BE49-F238E27FC236}">
-                <a16:creationId xmlns:a16="http://schemas.microsoft.com/office/drawing/2014/main" id="{3747C25F-794C-441B-ADB3-99B577516A9E}"/>
+                <a16:creationId xmlns:a16="http://schemas.microsoft.com/office/drawing/2014/main" id="{5B6B8BC0-63C4-4F56-BDC6-26914C035098}"/>
               </a:ext>
             </a:extLst>
           </p:cNvPr>
@@ -4528,7 +4528,7 @@
           <p:cNvPr id="5" name="">
             <a:extLst xmlns:a="http://schemas.openxmlformats.org/drawingml/2006/main">
               <a:ext uri="{FF2B5EF4-FFF2-40B4-BE49-F238E27FC236}">
-                <a16:creationId xmlns:a16="http://schemas.microsoft.com/office/drawing/2014/main" id="{3B708AB2-5B83-4685-8B0F-BF9CF2331B2D}"/>
+                <a16:creationId xmlns:a16="http://schemas.microsoft.com/office/drawing/2014/main" id="{5939F5EE-ED1F-4765-8CB8-406A86020176}"/>
               </a:ext>
             </a:extLst>
           </p:cNvPr>
@@ -4585,7 +4585,7 @@
           <p:cNvPr id="6" name="">
             <a:extLst xmlns:a="http://schemas.openxmlformats.org/drawingml/2006/main">
               <a:ext uri="{FF2B5EF4-FFF2-40B4-BE49-F238E27FC236}">
-                <a16:creationId xmlns:a16="http://schemas.microsoft.com/office/drawing/2014/main" id="{08378C4B-45A2-49CE-9448-6E0C94585DD5}"/>
+                <a16:creationId xmlns:a16="http://schemas.microsoft.com/office/drawing/2014/main" id="{C35C730B-0B94-4E46-9AFF-1305ACBF3E93}"/>
               </a:ext>
             </a:extLst>
           </p:cNvPr>
@@ -4642,7 +4642,7 @@
           <p:cNvPr id="7" name="">
             <a:extLst xmlns:a="http://schemas.openxmlformats.org/drawingml/2006/main">
               <a:ext uri="{FF2B5EF4-FFF2-40B4-BE49-F238E27FC236}">
-                <a16:creationId xmlns:a16="http://schemas.microsoft.com/office/drawing/2014/main" id="{026EE2C2-7A27-4293-A457-3A613C328F73}"/>
+                <a16:creationId xmlns:a16="http://schemas.microsoft.com/office/drawing/2014/main" id="{5B592C89-F893-4505-9603-FE46D1534D65}"/>
               </a:ext>
             </a:extLst>
           </p:cNvPr>
@@ -4674,7 +4674,7 @@
           <p:cNvPr id="8" name="">
             <a:extLst xmlns:a="http://schemas.openxmlformats.org/drawingml/2006/main">
               <a:ext uri="{FF2B5EF4-FFF2-40B4-BE49-F238E27FC236}">
-                <a16:creationId xmlns:a16="http://schemas.microsoft.com/office/drawing/2014/main" id="{F235D789-5BB6-42AC-AF27-F1A1C96C7B2F}"/>
+                <a16:creationId xmlns:a16="http://schemas.microsoft.com/office/drawing/2014/main" id="{74F3B4AD-DBF0-4791-A655-F69418F0570F}"/>
               </a:ext>
             </a:extLst>
           </p:cNvPr>
@@ -4731,7 +4731,7 @@
           <p:cNvPr id="9" name="">
             <a:extLst xmlns:a="http://schemas.openxmlformats.org/drawingml/2006/main">
               <a:ext uri="{FF2B5EF4-FFF2-40B4-BE49-F238E27FC236}">
-                <a16:creationId xmlns:a16="http://schemas.microsoft.com/office/drawing/2014/main" id="{737DE619-5D9D-47B7-B648-1EB93E5E5064}"/>
+                <a16:creationId xmlns:a16="http://schemas.microsoft.com/office/drawing/2014/main" id="{B990240B-79D5-4D1C-9719-2016E70A5CCC}"/>
               </a:ext>
             </a:extLst>
           </p:cNvPr>
@@ -4788,7 +4788,7 @@
           <p:cNvPr id="10" name="">
             <a:extLst xmlns:a="http://schemas.openxmlformats.org/drawingml/2006/main">
               <a:ext uri="{FF2B5EF4-FFF2-40B4-BE49-F238E27FC236}">
-                <a16:creationId xmlns:a16="http://schemas.microsoft.com/office/drawing/2014/main" id="{9273BDD3-3473-478E-87EF-ECA75D5E75D1}"/>
+                <a16:creationId xmlns:a16="http://schemas.microsoft.com/office/drawing/2014/main" id="{EB93655E-7BE7-445F-82B6-63B301DDEADB}"/>
               </a:ext>
             </a:extLst>
           </p:cNvPr>
@@ -4822,7 +4822,7 @@
           <p:cNvPr id="11" name="">
             <a:extLst xmlns:a="http://schemas.openxmlformats.org/drawingml/2006/main">
               <a:ext uri="{FF2B5EF4-FFF2-40B4-BE49-F238E27FC236}">
-                <a16:creationId xmlns:a16="http://schemas.microsoft.com/office/drawing/2014/main" id="{775E5A83-1BE7-43EF-A4CA-7C2DA48DA4BA}"/>
+                <a16:creationId xmlns:a16="http://schemas.microsoft.com/office/drawing/2014/main" id="{B7CD8FD3-E337-4926-9635-EB94026DBCB8}"/>
               </a:ext>
             </a:extLst>
           </p:cNvPr>
@@ -4854,7 +4854,7 @@
           <p:cNvPr id="12" name="">
             <a:extLst xmlns:a="http://schemas.openxmlformats.org/drawingml/2006/main">
               <a:ext uri="{FF2B5EF4-FFF2-40B4-BE49-F238E27FC236}">
-                <a16:creationId xmlns:a16="http://schemas.microsoft.com/office/drawing/2014/main" id="{D3118680-5DEE-43F2-A4BF-F571278C49F0}"/>
+                <a16:creationId xmlns:a16="http://schemas.microsoft.com/office/drawing/2014/main" id="{B8A06A6E-BCF0-4613-9930-F9D9B8356E6A}"/>
               </a:ext>
             </a:extLst>
           </p:cNvPr>
@@ -4911,7 +4911,7 @@
           <p:cNvPr id="13" name="">
             <a:extLst xmlns:a="http://schemas.openxmlformats.org/drawingml/2006/main">
               <a:ext uri="{FF2B5EF4-FFF2-40B4-BE49-F238E27FC236}">
-                <a16:creationId xmlns:a16="http://schemas.microsoft.com/office/drawing/2014/main" id="{CFECFD99-DD36-442B-AD6B-F05EA1CFE05F}"/>
+                <a16:creationId xmlns:a16="http://schemas.microsoft.com/office/drawing/2014/main" id="{D7E106F8-A3B9-429E-A37C-1E0917FBAC70}"/>
               </a:ext>
             </a:extLst>
           </p:cNvPr>
@@ -4968,7 +4968,7 @@
           <p:cNvPr id="14" name="">
             <a:extLst xmlns:a="http://schemas.openxmlformats.org/drawingml/2006/main">
               <a:ext uri="{FF2B5EF4-FFF2-40B4-BE49-F238E27FC236}">
-                <a16:creationId xmlns:a16="http://schemas.microsoft.com/office/drawing/2014/main" id="{A4B159C9-3178-45D0-A1E3-00BA304AD5EC}"/>
+                <a16:creationId xmlns:a16="http://schemas.microsoft.com/office/drawing/2014/main" id="{CE133A82-CA49-4F54-99F1-FB096A2FD4FA}"/>
               </a:ext>
             </a:extLst>
           </p:cNvPr>
@@ -5002,7 +5002,7 @@
           <p:cNvPr id="15" name="">
             <a:extLst xmlns:a="http://schemas.openxmlformats.org/drawingml/2006/main">
               <a:ext uri="{FF2B5EF4-FFF2-40B4-BE49-F238E27FC236}">
-                <a16:creationId xmlns:a16="http://schemas.microsoft.com/office/drawing/2014/main" id="{E7CAF976-F85B-4DCA-9759-1C2672D1CB55}"/>
+                <a16:creationId xmlns:a16="http://schemas.microsoft.com/office/drawing/2014/main" id="{DB356F42-0465-4B8B-AF24-BF1C07CA57C9}"/>
               </a:ext>
             </a:extLst>
           </p:cNvPr>
@@ -5034,7 +5034,7 @@
           <p:cNvPr id="16" name="">
             <a:extLst xmlns:a="http://schemas.openxmlformats.org/drawingml/2006/main">
               <a:ext uri="{FF2B5EF4-FFF2-40B4-BE49-F238E27FC236}">
-                <a16:creationId xmlns:a16="http://schemas.microsoft.com/office/drawing/2014/main" id="{4837BF65-152A-408B-8460-73EB75DC8320}"/>
+                <a16:creationId xmlns:a16="http://schemas.microsoft.com/office/drawing/2014/main" id="{9790D86B-FEFD-40C6-93F4-C31E3DB120A7}"/>
               </a:ext>
             </a:extLst>
           </p:cNvPr>
@@ -5091,7 +5091,7 @@
           <p:cNvPr id="17" name="">
             <a:extLst xmlns:a="http://schemas.openxmlformats.org/drawingml/2006/main">
               <a:ext uri="{FF2B5EF4-FFF2-40B4-BE49-F238E27FC236}">
-                <a16:creationId xmlns:a16="http://schemas.microsoft.com/office/drawing/2014/main" id="{C8BAC1FD-53E6-4B67-9389-F8D76768D12D}"/>
+                <a16:creationId xmlns:a16="http://schemas.microsoft.com/office/drawing/2014/main" id="{E760BC28-39C7-4002-91C0-CA3DDF216BEB}"/>
               </a:ext>
             </a:extLst>
           </p:cNvPr>
@@ -5148,7 +5148,7 @@
           <p:cNvPr id="18" name="">
             <a:extLst xmlns:a="http://schemas.openxmlformats.org/drawingml/2006/main">
               <a:ext uri="{FF2B5EF4-FFF2-40B4-BE49-F238E27FC236}">
-                <a16:creationId xmlns:a16="http://schemas.microsoft.com/office/drawing/2014/main" id="{A15A775D-2FE7-412D-A9E0-C05FDB6BF524}"/>
+                <a16:creationId xmlns:a16="http://schemas.microsoft.com/office/drawing/2014/main" id="{8D9B59F7-E987-4E44-A526-1C5E5E09DF6E}"/>
               </a:ext>
             </a:extLst>
           </p:cNvPr>
@@ -5182,7 +5182,7 @@
           <p:cNvPr id="19" name="">
             <a:extLst xmlns:a="http://schemas.openxmlformats.org/drawingml/2006/main">
               <a:ext uri="{FF2B5EF4-FFF2-40B4-BE49-F238E27FC236}">
-                <a16:creationId xmlns:a16="http://schemas.microsoft.com/office/drawing/2014/main" id="{9D5CB180-9A14-4DBC-A4EC-5AD545209DC2}"/>
+                <a16:creationId xmlns:a16="http://schemas.microsoft.com/office/drawing/2014/main" id="{DE63673B-7E18-4789-8D62-D3D436399EF3}"/>
               </a:ext>
             </a:extLst>
           </p:cNvPr>
@@ -5214,7 +5214,7 @@
           <p:cNvPr id="20" name="">
             <a:extLst xmlns:a="http://schemas.openxmlformats.org/drawingml/2006/main">
               <a:ext uri="{FF2B5EF4-FFF2-40B4-BE49-F238E27FC236}">
-                <a16:creationId xmlns:a16="http://schemas.microsoft.com/office/drawing/2014/main" id="{E0233E32-CA58-4F51-99D5-68413AB9DA76}"/>
+                <a16:creationId xmlns:a16="http://schemas.microsoft.com/office/drawing/2014/main" id="{F365273B-96DD-40D3-A2B5-7FF7F551ADD3}"/>
               </a:ext>
             </a:extLst>
           </p:cNvPr>
@@ -5271,7 +5271,7 @@
           <p:cNvPr id="21" name="">
             <a:extLst xmlns:a="http://schemas.openxmlformats.org/drawingml/2006/main">
               <a:ext uri="{FF2B5EF4-FFF2-40B4-BE49-F238E27FC236}">
-                <a16:creationId xmlns:a16="http://schemas.microsoft.com/office/drawing/2014/main" id="{D12151D8-6E68-4CFF-8275-D1BE54936BAA}"/>
+                <a16:creationId xmlns:a16="http://schemas.microsoft.com/office/drawing/2014/main" id="{C21CBBDB-FE27-4EEF-A676-D5588597B245}"/>
               </a:ext>
             </a:extLst>
           </p:cNvPr>
@@ -5328,7 +5328,7 @@
           <p:cNvPr id="22" name="">
             <a:extLst xmlns:a="http://schemas.openxmlformats.org/drawingml/2006/main">
               <a:ext uri="{FF2B5EF4-FFF2-40B4-BE49-F238E27FC236}">
-                <a16:creationId xmlns:a16="http://schemas.microsoft.com/office/drawing/2014/main" id="{07E521C0-FF87-4561-810D-2FEEAEC45C78}"/>
+                <a16:creationId xmlns:a16="http://schemas.microsoft.com/office/drawing/2014/main" id="{2D345F17-D517-4361-BEEE-4AF6F18274B0}"/>
               </a:ext>
             </a:extLst>
           </p:cNvPr>
@@ -5383,7 +5383,7 @@
     </p:spTree>
     <p:extLst>
       <p:ext uri="{BB962C8B-B14F-4D97-AF65-F5344CB8AC3E}">
-        <p14:creationId xmlns:p14="http://schemas.microsoft.com/office/powerpoint/2010/main" val="318574446"/>
+        <p14:creationId xmlns:p14="http://schemas.microsoft.com/office/powerpoint/2010/main" val="70117238"/>
       </p:ext>
     </p:extLst>
   </p:cSld>
@@ -5584,7 +5584,7 @@
           <p:cNvPr id="23" name="">
             <a:extLst xmlns:a="http://schemas.openxmlformats.org/drawingml/2006/main">
               <a:ext uri="{FF2B5EF4-FFF2-40B4-BE49-F238E27FC236}">
-                <a16:creationId xmlns:a16="http://schemas.microsoft.com/office/drawing/2014/main" id="{BC9547E9-5D1D-43D3-9038-68E8D4656B58}"/>
+                <a16:creationId xmlns:a16="http://schemas.microsoft.com/office/drawing/2014/main" id="{225AEDCE-6ECC-4BBD-BCD2-83242B5F8778}"/>
               </a:ext>
             </a:extLst>
           </p:cNvPr>
@@ -5616,7 +5616,7 @@
           <p:cNvPr id="2" name="">
             <a:extLst xmlns:a="http://schemas.openxmlformats.org/drawingml/2006/main">
               <a:ext uri="{FF2B5EF4-FFF2-40B4-BE49-F238E27FC236}">
-                <a16:creationId xmlns:a16="http://schemas.microsoft.com/office/drawing/2014/main" id="{E3F42A17-1451-414F-978E-F67299150326}"/>
+                <a16:creationId xmlns:a16="http://schemas.microsoft.com/office/drawing/2014/main" id="{97D2F87D-A335-47AF-A2C0-15181FE81840}"/>
               </a:ext>
             </a:extLst>
           </p:cNvPr>
@@ -5673,7 +5673,7 @@
           <p:cNvPr id="3" name="">
             <a:extLst xmlns:a="http://schemas.openxmlformats.org/drawingml/2006/main">
               <a:ext uri="{FF2B5EF4-FFF2-40B4-BE49-F238E27FC236}">
-                <a16:creationId xmlns:a16="http://schemas.microsoft.com/office/drawing/2014/main" id="{A7918599-BCA2-4B95-85E9-84C59D8D7B79}"/>
+                <a16:creationId xmlns:a16="http://schemas.microsoft.com/office/drawing/2014/main" id="{523EBA5B-FECF-47D6-8786-800C042971D0}"/>
               </a:ext>
             </a:extLst>
           </p:cNvPr>
@@ -5705,7 +5705,7 @@
           <p:cNvPr id="4" name="">
             <a:extLst xmlns:a="http://schemas.openxmlformats.org/drawingml/2006/main">
               <a:ext uri="{FF2B5EF4-FFF2-40B4-BE49-F238E27FC236}">
-                <a16:creationId xmlns:a16="http://schemas.microsoft.com/office/drawing/2014/main" id="{4406C0C5-C06D-4987-9E94-79ED2BCE5C86}"/>
+                <a16:creationId xmlns:a16="http://schemas.microsoft.com/office/drawing/2014/main" id="{E8F99591-C53A-4C4E-8358-EE45E8A3C9E7}"/>
               </a:ext>
             </a:extLst>
           </p:cNvPr>
@@ -5762,7 +5762,7 @@
           <p:cNvPr id="5" name="">
             <a:extLst xmlns:a="http://schemas.openxmlformats.org/drawingml/2006/main">
               <a:ext uri="{FF2B5EF4-FFF2-40B4-BE49-F238E27FC236}">
-                <a16:creationId xmlns:a16="http://schemas.microsoft.com/office/drawing/2014/main" id="{3B9CBA2D-2D45-4768-A7A2-CF44FD17DB8E}"/>
+                <a16:creationId xmlns:a16="http://schemas.microsoft.com/office/drawing/2014/main" id="{586B2369-C500-42CC-B70A-4FE26D10A64B}"/>
               </a:ext>
             </a:extLst>
           </p:cNvPr>
@@ -5819,7 +5819,7 @@
           <p:cNvPr id="6" name="">
             <a:extLst xmlns:a="http://schemas.openxmlformats.org/drawingml/2006/main">
               <a:ext uri="{FF2B5EF4-FFF2-40B4-BE49-F238E27FC236}">
-                <a16:creationId xmlns:a16="http://schemas.microsoft.com/office/drawing/2014/main" id="{56EF8CED-9EEF-40A9-9087-DFD4CE31D33F}"/>
+                <a16:creationId xmlns:a16="http://schemas.microsoft.com/office/drawing/2014/main" id="{44D42EB0-7A94-48CF-A137-D81CAF325343}"/>
               </a:ext>
             </a:extLst>
           </p:cNvPr>
@@ -5876,7 +5876,7 @@
           <p:cNvPr id="7" name="">
             <a:extLst xmlns:a="http://schemas.openxmlformats.org/drawingml/2006/main">
               <a:ext uri="{FF2B5EF4-FFF2-40B4-BE49-F238E27FC236}">
-                <a16:creationId xmlns:a16="http://schemas.microsoft.com/office/drawing/2014/main" id="{6A98D359-9292-446A-BA55-E55A07B25E93}"/>
+                <a16:creationId xmlns:a16="http://schemas.microsoft.com/office/drawing/2014/main" id="{D675F960-EC17-4103-8AF3-0F4F40912C7F}"/>
               </a:ext>
             </a:extLst>
           </p:cNvPr>
@@ -5908,7 +5908,7 @@
           <p:cNvPr id="8" name="">
             <a:extLst xmlns:a="http://schemas.openxmlformats.org/drawingml/2006/main">
               <a:ext uri="{FF2B5EF4-FFF2-40B4-BE49-F238E27FC236}">
-                <a16:creationId xmlns:a16="http://schemas.microsoft.com/office/drawing/2014/main" id="{5EDBDA7F-AB75-4CE7-9315-E485205E7A71}"/>
+                <a16:creationId xmlns:a16="http://schemas.microsoft.com/office/drawing/2014/main" id="{8AF50429-531A-4E87-81F6-50349FF20D45}"/>
               </a:ext>
             </a:extLst>
           </p:cNvPr>
@@ -5965,7 +5965,7 @@
           <p:cNvPr id="9" name="">
             <a:extLst xmlns:a="http://schemas.openxmlformats.org/drawingml/2006/main">
               <a:ext uri="{FF2B5EF4-FFF2-40B4-BE49-F238E27FC236}">
-                <a16:creationId xmlns:a16="http://schemas.microsoft.com/office/drawing/2014/main" id="{70EF8E29-C481-4448-A8F4-C0F33EEEF222}"/>
+                <a16:creationId xmlns:a16="http://schemas.microsoft.com/office/drawing/2014/main" id="{CE0D49EF-43C9-4521-803D-B43CCFF52009}"/>
               </a:ext>
             </a:extLst>
           </p:cNvPr>
@@ -6022,7 +6022,7 @@
           <p:cNvPr id="10" name="">
             <a:extLst xmlns:a="http://schemas.openxmlformats.org/drawingml/2006/main">
               <a:ext uri="{FF2B5EF4-FFF2-40B4-BE49-F238E27FC236}">
-                <a16:creationId xmlns:a16="http://schemas.microsoft.com/office/drawing/2014/main" id="{C7B04B8D-2854-4060-926D-7A8EB8F85ED5}"/>
+                <a16:creationId xmlns:a16="http://schemas.microsoft.com/office/drawing/2014/main" id="{04039C84-62EF-4723-BC91-E64C70883F19}"/>
               </a:ext>
             </a:extLst>
           </p:cNvPr>
@@ -6056,7 +6056,7 @@
           <p:cNvPr id="11" name="">
             <a:extLst xmlns:a="http://schemas.openxmlformats.org/drawingml/2006/main">
               <a:ext uri="{FF2B5EF4-FFF2-40B4-BE49-F238E27FC236}">
-                <a16:creationId xmlns:a16="http://schemas.microsoft.com/office/drawing/2014/main" id="{D145C3B1-ADF0-42A6-9056-45A6642CBAA3}"/>
+                <a16:creationId xmlns:a16="http://schemas.microsoft.com/office/drawing/2014/main" id="{4C6B255E-B600-4E10-BF62-FEDA86A4B18D}"/>
               </a:ext>
             </a:extLst>
           </p:cNvPr>
@@ -6088,7 +6088,7 @@
           <p:cNvPr id="12" name="">
             <a:extLst xmlns:a="http://schemas.openxmlformats.org/drawingml/2006/main">
               <a:ext uri="{FF2B5EF4-FFF2-40B4-BE49-F238E27FC236}">
-                <a16:creationId xmlns:a16="http://schemas.microsoft.com/office/drawing/2014/main" id="{F641A172-C95C-49A8-A831-74F6BCB343FD}"/>
+                <a16:creationId xmlns:a16="http://schemas.microsoft.com/office/drawing/2014/main" id="{833BE90E-37DE-4B5B-A8FC-5474E59AE334}"/>
               </a:ext>
             </a:extLst>
           </p:cNvPr>
@@ -6145,7 +6145,7 @@
           <p:cNvPr id="13" name="">
             <a:extLst xmlns:a="http://schemas.openxmlformats.org/drawingml/2006/main">
               <a:ext uri="{FF2B5EF4-FFF2-40B4-BE49-F238E27FC236}">
-                <a16:creationId xmlns:a16="http://schemas.microsoft.com/office/drawing/2014/main" id="{FCB04AAD-C5DB-488F-AEC5-8C2614959FE5}"/>
+                <a16:creationId xmlns:a16="http://schemas.microsoft.com/office/drawing/2014/main" id="{703FE417-564C-4876-9492-2566AD2FDF9E}"/>
               </a:ext>
             </a:extLst>
           </p:cNvPr>
@@ -6202,7 +6202,7 @@
           <p:cNvPr id="14" name="">
             <a:extLst xmlns:a="http://schemas.openxmlformats.org/drawingml/2006/main">
               <a:ext uri="{FF2B5EF4-FFF2-40B4-BE49-F238E27FC236}">
-                <a16:creationId xmlns:a16="http://schemas.microsoft.com/office/drawing/2014/main" id="{9AEE7F16-E0EC-46A4-BF36-8F4902322C36}"/>
+                <a16:creationId xmlns:a16="http://schemas.microsoft.com/office/drawing/2014/main" id="{B8EEF078-C75D-4C35-A917-DE64BACEED34}"/>
               </a:ext>
             </a:extLst>
           </p:cNvPr>
@@ -6236,7 +6236,7 @@
           <p:cNvPr id="15" name="">
             <a:extLst xmlns:a="http://schemas.openxmlformats.org/drawingml/2006/main">
               <a:ext uri="{FF2B5EF4-FFF2-40B4-BE49-F238E27FC236}">
-                <a16:creationId xmlns:a16="http://schemas.microsoft.com/office/drawing/2014/main" id="{F01D3D67-C371-4F6E-9D81-1DD78E963C03}"/>
+                <a16:creationId xmlns:a16="http://schemas.microsoft.com/office/drawing/2014/main" id="{5A4522FF-531F-4815-8AD2-FA91FF0F9D86}"/>
               </a:ext>
             </a:extLst>
           </p:cNvPr>
@@ -6268,7 +6268,7 @@
           <p:cNvPr id="16" name="">
             <a:extLst xmlns:a="http://schemas.openxmlformats.org/drawingml/2006/main">
               <a:ext uri="{FF2B5EF4-FFF2-40B4-BE49-F238E27FC236}">
-                <a16:creationId xmlns:a16="http://schemas.microsoft.com/office/drawing/2014/main" id="{05DA7CFF-8B92-46D8-B53E-8F1BD22CC551}"/>
+                <a16:creationId xmlns:a16="http://schemas.microsoft.com/office/drawing/2014/main" id="{18F76CB5-D2B8-40D3-83D3-DC9B10DEFD0C}"/>
               </a:ext>
             </a:extLst>
           </p:cNvPr>
@@ -6325,7 +6325,7 @@
           <p:cNvPr id="17" name="">
             <a:extLst xmlns:a="http://schemas.openxmlformats.org/drawingml/2006/main">
               <a:ext uri="{FF2B5EF4-FFF2-40B4-BE49-F238E27FC236}">
-                <a16:creationId xmlns:a16="http://schemas.microsoft.com/office/drawing/2014/main" id="{590D3679-FB71-4BCA-801C-3603C5B87CA0}"/>
+                <a16:creationId xmlns:a16="http://schemas.microsoft.com/office/drawing/2014/main" id="{0AB640C1-DABF-4108-8198-BEA0623315E9}"/>
               </a:ext>
             </a:extLst>
           </p:cNvPr>
@@ -6382,7 +6382,7 @@
           <p:cNvPr id="18" name="">
             <a:extLst xmlns:a="http://schemas.openxmlformats.org/drawingml/2006/main">
               <a:ext uri="{FF2B5EF4-FFF2-40B4-BE49-F238E27FC236}">
-                <a16:creationId xmlns:a16="http://schemas.microsoft.com/office/drawing/2014/main" id="{E43C4B02-31E1-4024-840C-EFCD0E99BD55}"/>
+                <a16:creationId xmlns:a16="http://schemas.microsoft.com/office/drawing/2014/main" id="{CC444AD0-94CD-4E01-982E-0900C1F96689}"/>
               </a:ext>
             </a:extLst>
           </p:cNvPr>
@@ -6416,7 +6416,7 @@
           <p:cNvPr id="19" name="">
             <a:extLst xmlns:a="http://schemas.openxmlformats.org/drawingml/2006/main">
               <a:ext uri="{FF2B5EF4-FFF2-40B4-BE49-F238E27FC236}">
-                <a16:creationId xmlns:a16="http://schemas.microsoft.com/office/drawing/2014/main" id="{2EB0EEFD-2F26-4599-A925-E314C25F3685}"/>
+                <a16:creationId xmlns:a16="http://schemas.microsoft.com/office/drawing/2014/main" id="{D6809763-C146-4035-9063-C73B2B67F92B}"/>
               </a:ext>
             </a:extLst>
           </p:cNvPr>
@@ -6448,7 +6448,7 @@
           <p:cNvPr id="20" name="">
             <a:extLst xmlns:a="http://schemas.openxmlformats.org/drawingml/2006/main">
               <a:ext uri="{FF2B5EF4-FFF2-40B4-BE49-F238E27FC236}">
-                <a16:creationId xmlns:a16="http://schemas.microsoft.com/office/drawing/2014/main" id="{C43D0F57-40E8-4D8F-8A66-7B97D2DA6989}"/>
+                <a16:creationId xmlns:a16="http://schemas.microsoft.com/office/drawing/2014/main" id="{ADEB1769-E1AF-4049-8E3E-9C226C815FA6}"/>
               </a:ext>
             </a:extLst>
           </p:cNvPr>
@@ -6505,7 +6505,7 @@
           <p:cNvPr id="21" name="">
             <a:extLst xmlns:a="http://schemas.openxmlformats.org/drawingml/2006/main">
               <a:ext uri="{FF2B5EF4-FFF2-40B4-BE49-F238E27FC236}">
-                <a16:creationId xmlns:a16="http://schemas.microsoft.com/office/drawing/2014/main" id="{3A122F4A-6A96-48E2-A4A3-9F9372653F10}"/>
+                <a16:creationId xmlns:a16="http://schemas.microsoft.com/office/drawing/2014/main" id="{E136E01B-3567-40FA-B0A0-FE1C6D11BE8F}"/>
               </a:ext>
             </a:extLst>
           </p:cNvPr>
@@ -6562,7 +6562,7 @@
           <p:cNvPr id="22" name="">
             <a:extLst xmlns:a="http://schemas.openxmlformats.org/drawingml/2006/main">
               <a:ext uri="{FF2B5EF4-FFF2-40B4-BE49-F238E27FC236}">
-                <a16:creationId xmlns:a16="http://schemas.microsoft.com/office/drawing/2014/main" id="{20D53984-DD4C-4E6A-A3D9-CD3556C3F8E6}"/>
+                <a16:creationId xmlns:a16="http://schemas.microsoft.com/office/drawing/2014/main" id="{FC3CE8D5-9567-40CA-925B-14D576238451}"/>
               </a:ext>
             </a:extLst>
           </p:cNvPr>
@@ -6617,7 +6617,7 @@
     </p:spTree>
     <p:extLst>
       <p:ext uri="{BB962C8B-B14F-4D97-AF65-F5344CB8AC3E}">
-        <p14:creationId xmlns:p14="http://schemas.microsoft.com/office/powerpoint/2010/main" val="1373271726"/>
+        <p14:creationId xmlns:p14="http://schemas.microsoft.com/office/powerpoint/2010/main" val="805210541"/>
       </p:ext>
     </p:extLst>
   </p:cSld>
@@ -6818,7 +6818,7 @@
           <p:cNvPr id="16" name="">
             <a:extLst xmlns:a="http://schemas.openxmlformats.org/drawingml/2006/main">
               <a:ext uri="{FF2B5EF4-FFF2-40B4-BE49-F238E27FC236}">
-                <a16:creationId xmlns:a16="http://schemas.microsoft.com/office/drawing/2014/main" id="{48539814-E436-4684-B715-34643199EEAB}"/>
+                <a16:creationId xmlns:a16="http://schemas.microsoft.com/office/drawing/2014/main" id="{57433F99-D875-4668-B118-6A4CB81477A4}"/>
               </a:ext>
             </a:extLst>
           </p:cNvPr>
@@ -6850,7 +6850,7 @@
           <p:cNvPr id="2" name="">
             <a:extLst xmlns:a="http://schemas.openxmlformats.org/drawingml/2006/main">
               <a:ext uri="{FF2B5EF4-FFF2-40B4-BE49-F238E27FC236}">
-                <a16:creationId xmlns:a16="http://schemas.microsoft.com/office/drawing/2014/main" id="{58E8B8B7-CF76-42B5-945F-8BFDEEE67F50}"/>
+                <a16:creationId xmlns:a16="http://schemas.microsoft.com/office/drawing/2014/main" id="{9D4B232D-FB2E-4BCD-B79F-45D532DA1706}"/>
               </a:ext>
             </a:extLst>
           </p:cNvPr>
@@ -6907,7 +6907,7 @@
           <p:cNvPr id="3" name="">
             <a:extLst xmlns:a="http://schemas.openxmlformats.org/drawingml/2006/main">
               <a:ext uri="{FF2B5EF4-FFF2-40B4-BE49-F238E27FC236}">
-                <a16:creationId xmlns:a16="http://schemas.microsoft.com/office/drawing/2014/main" id="{DE9EDF93-1580-4D09-8677-7366F38FC924}"/>
+                <a16:creationId xmlns:a16="http://schemas.microsoft.com/office/drawing/2014/main" id="{F6A2DBAD-D79B-40C4-9A44-99E372666031}"/>
               </a:ext>
             </a:extLst>
           </p:cNvPr>
@@ -6939,7 +6939,7 @@
           <p:cNvPr id="4" name="">
             <a:extLst xmlns:a="http://schemas.openxmlformats.org/drawingml/2006/main">
               <a:ext uri="{FF2B5EF4-FFF2-40B4-BE49-F238E27FC236}">
-                <a16:creationId xmlns:a16="http://schemas.microsoft.com/office/drawing/2014/main" id="{3EE2B4AF-46F1-41E8-AAFE-D636151B152F}"/>
+                <a16:creationId xmlns:a16="http://schemas.microsoft.com/office/drawing/2014/main" id="{6DE36AA8-F209-4D71-B159-EA28020C6A14}"/>
               </a:ext>
             </a:extLst>
           </p:cNvPr>
@@ -6996,7 +6996,7 @@
           <p:cNvPr id="5" name="">
             <a:extLst xmlns:a="http://schemas.openxmlformats.org/drawingml/2006/main">
               <a:ext uri="{FF2B5EF4-FFF2-40B4-BE49-F238E27FC236}">
-                <a16:creationId xmlns:a16="http://schemas.microsoft.com/office/drawing/2014/main" id="{1FDC3ACA-3412-4415-B0D5-8281FA32FE8D}"/>
+                <a16:creationId xmlns:a16="http://schemas.microsoft.com/office/drawing/2014/main" id="{87B54D48-C0CD-44DF-8D5D-390FCA5F7A40}"/>
               </a:ext>
             </a:extLst>
           </p:cNvPr>
@@ -7053,7 +7053,7 @@
           <p:cNvPr id="6" name="">
             <a:extLst xmlns:a="http://schemas.openxmlformats.org/drawingml/2006/main">
               <a:ext uri="{FF2B5EF4-FFF2-40B4-BE49-F238E27FC236}">
-                <a16:creationId xmlns:a16="http://schemas.microsoft.com/office/drawing/2014/main" id="{7F8CC2AB-19D5-4BC7-B32B-3670D7110A82}"/>
+                <a16:creationId xmlns:a16="http://schemas.microsoft.com/office/drawing/2014/main" id="{8152B7FC-4834-48F2-9166-DC370B547B12}"/>
               </a:ext>
             </a:extLst>
           </p:cNvPr>
@@ -7110,7 +7110,7 @@
           <p:cNvPr id="7" name="">
             <a:extLst xmlns:a="http://schemas.openxmlformats.org/drawingml/2006/main">
               <a:ext uri="{FF2B5EF4-FFF2-40B4-BE49-F238E27FC236}">
-                <a16:creationId xmlns:a16="http://schemas.microsoft.com/office/drawing/2014/main" id="{8714D964-5D33-4BBA-AF7F-5C9B13437C8A}"/>
+                <a16:creationId xmlns:a16="http://schemas.microsoft.com/office/drawing/2014/main" id="{0F481ACA-05AC-4357-A8FD-FAF50B58D745}"/>
               </a:ext>
             </a:extLst>
           </p:cNvPr>
@@ -7142,7 +7142,7 @@
           <p:cNvPr id="8" name="">
             <a:extLst xmlns:a="http://schemas.openxmlformats.org/drawingml/2006/main">
               <a:ext uri="{FF2B5EF4-FFF2-40B4-BE49-F238E27FC236}">
-                <a16:creationId xmlns:a16="http://schemas.microsoft.com/office/drawing/2014/main" id="{96AF7F3C-4E88-4D16-83FC-077671650B49}"/>
+                <a16:creationId xmlns:a16="http://schemas.microsoft.com/office/drawing/2014/main" id="{B5BF6420-A57A-42F5-8286-38A6B5FBBD8E}"/>
               </a:ext>
             </a:extLst>
           </p:cNvPr>
@@ -7199,7 +7199,7 @@
           <p:cNvPr id="9" name="">
             <a:extLst xmlns:a="http://schemas.openxmlformats.org/drawingml/2006/main">
               <a:ext uri="{FF2B5EF4-FFF2-40B4-BE49-F238E27FC236}">
-                <a16:creationId xmlns:a16="http://schemas.microsoft.com/office/drawing/2014/main" id="{62DD1FFC-950C-4409-B654-2B2D4A47B262}"/>
+                <a16:creationId xmlns:a16="http://schemas.microsoft.com/office/drawing/2014/main" id="{A71CBF24-DA7A-419D-B536-A96C132BEA2F}"/>
               </a:ext>
             </a:extLst>
           </p:cNvPr>
@@ -7256,7 +7256,7 @@
           <p:cNvPr id="10" name="">
             <a:extLst xmlns:a="http://schemas.openxmlformats.org/drawingml/2006/main">
               <a:ext uri="{FF2B5EF4-FFF2-40B4-BE49-F238E27FC236}">
-                <a16:creationId xmlns:a16="http://schemas.microsoft.com/office/drawing/2014/main" id="{90B0FA11-C0AC-4843-939A-0E3B4560E4B8}"/>
+                <a16:creationId xmlns:a16="http://schemas.microsoft.com/office/drawing/2014/main" id="{BE607CD6-2D8A-4369-8FCB-F9518E91A614}"/>
               </a:ext>
             </a:extLst>
           </p:cNvPr>
@@ -7313,7 +7313,7 @@
           <p:cNvPr id="11" name="">
             <a:extLst xmlns:a="http://schemas.openxmlformats.org/drawingml/2006/main">
               <a:ext uri="{FF2B5EF4-FFF2-40B4-BE49-F238E27FC236}">
-                <a16:creationId xmlns:a16="http://schemas.microsoft.com/office/drawing/2014/main" id="{DD55983C-20FF-4643-A259-985D553B94CC}"/>
+                <a16:creationId xmlns:a16="http://schemas.microsoft.com/office/drawing/2014/main" id="{21F62880-5AD0-46D4-A34E-E2A96DAF1B96}"/>
               </a:ext>
             </a:extLst>
           </p:cNvPr>
@@ -7345,7 +7345,7 @@
           <p:cNvPr id="12" name="">
             <a:extLst xmlns:a="http://schemas.openxmlformats.org/drawingml/2006/main">
               <a:ext uri="{FF2B5EF4-FFF2-40B4-BE49-F238E27FC236}">
-                <a16:creationId xmlns:a16="http://schemas.microsoft.com/office/drawing/2014/main" id="{8511F767-0FDE-4A58-9EFB-D0027C300437}"/>
+                <a16:creationId xmlns:a16="http://schemas.microsoft.com/office/drawing/2014/main" id="{9447D574-B2D7-4BF0-855B-2C47DA343C02}"/>
               </a:ext>
             </a:extLst>
           </p:cNvPr>
@@ -7402,7 +7402,7 @@
           <p:cNvPr id="13" name="">
             <a:extLst xmlns:a="http://schemas.openxmlformats.org/drawingml/2006/main">
               <a:ext uri="{FF2B5EF4-FFF2-40B4-BE49-F238E27FC236}">
-                <a16:creationId xmlns:a16="http://schemas.microsoft.com/office/drawing/2014/main" id="{8FE9C31F-BE47-4BD3-8326-BB9F5B1D672C}"/>
+                <a16:creationId xmlns:a16="http://schemas.microsoft.com/office/drawing/2014/main" id="{C32170C0-66D7-4B7D-8909-CA81D9DFF9BA}"/>
               </a:ext>
             </a:extLst>
           </p:cNvPr>
@@ -7459,7 +7459,7 @@
           <p:cNvPr id="14" name="">
             <a:extLst xmlns:a="http://schemas.openxmlformats.org/drawingml/2006/main">
               <a:ext uri="{FF2B5EF4-FFF2-40B4-BE49-F238E27FC236}">
-                <a16:creationId xmlns:a16="http://schemas.microsoft.com/office/drawing/2014/main" id="{BCA80524-57BF-440D-B2BD-8D81973DAB54}"/>
+                <a16:creationId xmlns:a16="http://schemas.microsoft.com/office/drawing/2014/main" id="{5C4EACE7-345F-4608-8E07-9A91B46C1F06}"/>
               </a:ext>
             </a:extLst>
           </p:cNvPr>
@@ -7516,7 +7516,7 @@
           <p:cNvPr id="15" name="">
             <a:extLst xmlns:a="http://schemas.openxmlformats.org/drawingml/2006/main">
               <a:ext uri="{FF2B5EF4-FFF2-40B4-BE49-F238E27FC236}">
-                <a16:creationId xmlns:a16="http://schemas.microsoft.com/office/drawing/2014/main" id="{A1F55F87-3BE0-4D8C-B713-CA10BB3513E7}"/>
+                <a16:creationId xmlns:a16="http://schemas.microsoft.com/office/drawing/2014/main" id="{16415A8E-C765-438A-9C45-60382C8E2C0E}"/>
               </a:ext>
             </a:extLst>
           </p:cNvPr>
@@ -7571,7 +7571,7 @@
     </p:spTree>
     <p:extLst>
       <p:ext uri="{BB962C8B-B14F-4D97-AF65-F5344CB8AC3E}">
-        <p14:creationId xmlns:p14="http://schemas.microsoft.com/office/powerpoint/2010/main" val="1468462744"/>
+        <p14:creationId xmlns:p14="http://schemas.microsoft.com/office/powerpoint/2010/main" val="1816161801"/>
       </p:ext>
     </p:extLst>
   </p:cSld>
@@ -7772,7 +7772,7 @@
           <p:cNvPr id="23" name="">
             <a:extLst xmlns:a="http://schemas.openxmlformats.org/drawingml/2006/main">
               <a:ext uri="{FF2B5EF4-FFF2-40B4-BE49-F238E27FC236}">
-                <a16:creationId xmlns:a16="http://schemas.microsoft.com/office/drawing/2014/main" id="{18FC7A89-6225-4BA5-BFD4-CB2A211F09AD}"/>
+                <a16:creationId xmlns:a16="http://schemas.microsoft.com/office/drawing/2014/main" id="{80E9576D-74C2-462C-9FAD-228AE3C32022}"/>
               </a:ext>
             </a:extLst>
           </p:cNvPr>
@@ -7804,7 +7804,7 @@
           <p:cNvPr id="2" name="">
             <a:extLst xmlns:a="http://schemas.openxmlformats.org/drawingml/2006/main">
               <a:ext uri="{FF2B5EF4-FFF2-40B4-BE49-F238E27FC236}">
-                <a16:creationId xmlns:a16="http://schemas.microsoft.com/office/drawing/2014/main" id="{850A2668-899D-4553-B58A-E95E58C5F88F}"/>
+                <a16:creationId xmlns:a16="http://schemas.microsoft.com/office/drawing/2014/main" id="{7742DF9A-5391-4AD9-88C2-3720C8E8DF65}"/>
               </a:ext>
             </a:extLst>
           </p:cNvPr>
@@ -7861,7 +7861,7 @@
           <p:cNvPr id="3" name="">
             <a:extLst xmlns:a="http://schemas.openxmlformats.org/drawingml/2006/main">
               <a:ext uri="{FF2B5EF4-FFF2-40B4-BE49-F238E27FC236}">
-                <a16:creationId xmlns:a16="http://schemas.microsoft.com/office/drawing/2014/main" id="{C43D8A19-8206-4B43-A216-34078A151755}"/>
+                <a16:creationId xmlns:a16="http://schemas.microsoft.com/office/drawing/2014/main" id="{68F40244-B0B3-44D5-A71E-2E3AA70DD314}"/>
               </a:ext>
             </a:extLst>
           </p:cNvPr>
@@ -7893,7 +7893,7 @@
           <p:cNvPr id="4" name="">
             <a:extLst xmlns:a="http://schemas.openxmlformats.org/drawingml/2006/main">
               <a:ext uri="{FF2B5EF4-FFF2-40B4-BE49-F238E27FC236}">
-                <a16:creationId xmlns:a16="http://schemas.microsoft.com/office/drawing/2014/main" id="{01415515-530B-496C-8759-BF654D860F84}"/>
+                <a16:creationId xmlns:a16="http://schemas.microsoft.com/office/drawing/2014/main" id="{384A28E5-5376-42CC-AFD2-FF46BBE8D153}"/>
               </a:ext>
             </a:extLst>
           </p:cNvPr>
@@ -7950,7 +7950,7 @@
           <p:cNvPr id="5" name="">
             <a:extLst xmlns:a="http://schemas.openxmlformats.org/drawingml/2006/main">
               <a:ext uri="{FF2B5EF4-FFF2-40B4-BE49-F238E27FC236}">
-                <a16:creationId xmlns:a16="http://schemas.microsoft.com/office/drawing/2014/main" id="{2E0152D5-E939-431C-9EA7-3E438FAD7A24}"/>
+                <a16:creationId xmlns:a16="http://schemas.microsoft.com/office/drawing/2014/main" id="{B11950E8-3759-44B5-A5A3-0E993B9365DE}"/>
               </a:ext>
             </a:extLst>
           </p:cNvPr>
@@ -8007,7 +8007,7 @@
           <p:cNvPr id="6" name="">
             <a:extLst xmlns:a="http://schemas.openxmlformats.org/drawingml/2006/main">
               <a:ext uri="{FF2B5EF4-FFF2-40B4-BE49-F238E27FC236}">
-                <a16:creationId xmlns:a16="http://schemas.microsoft.com/office/drawing/2014/main" id="{054AF91C-E625-4379-81AC-5F3CE5EE5B26}"/>
+                <a16:creationId xmlns:a16="http://schemas.microsoft.com/office/drawing/2014/main" id="{B2C25D10-EE13-4A0F-8409-AD6520B9BED7}"/>
               </a:ext>
             </a:extLst>
           </p:cNvPr>
@@ -8064,7 +8064,7 @@
           <p:cNvPr id="7" name="">
             <a:extLst xmlns:a="http://schemas.openxmlformats.org/drawingml/2006/main">
               <a:ext uri="{FF2B5EF4-FFF2-40B4-BE49-F238E27FC236}">
-                <a16:creationId xmlns:a16="http://schemas.microsoft.com/office/drawing/2014/main" id="{DB240B3D-A560-4023-BA00-63A263A20B28}"/>
+                <a16:creationId xmlns:a16="http://schemas.microsoft.com/office/drawing/2014/main" id="{059B9549-4924-4EE1-B56C-CB05B80340E5}"/>
               </a:ext>
             </a:extLst>
           </p:cNvPr>
@@ -8096,7 +8096,7 @@
           <p:cNvPr id="8" name="">
             <a:extLst xmlns:a="http://schemas.openxmlformats.org/drawingml/2006/main">
               <a:ext uri="{FF2B5EF4-FFF2-40B4-BE49-F238E27FC236}">
-                <a16:creationId xmlns:a16="http://schemas.microsoft.com/office/drawing/2014/main" id="{0FA3B28E-2B2F-42E6-8C43-97E969BF560B}"/>
+                <a16:creationId xmlns:a16="http://schemas.microsoft.com/office/drawing/2014/main" id="{1CAB1662-9381-4D95-A173-94BA7D622896}"/>
               </a:ext>
             </a:extLst>
           </p:cNvPr>
@@ -8153,7 +8153,7 @@
           <p:cNvPr id="9" name="">
             <a:extLst xmlns:a="http://schemas.openxmlformats.org/drawingml/2006/main">
               <a:ext uri="{FF2B5EF4-FFF2-40B4-BE49-F238E27FC236}">
-                <a16:creationId xmlns:a16="http://schemas.microsoft.com/office/drawing/2014/main" id="{577E778F-7C1C-4613-8791-79EA274598F0}"/>
+                <a16:creationId xmlns:a16="http://schemas.microsoft.com/office/drawing/2014/main" id="{41EB54C7-FBD4-4DDF-B408-6F125B5FA641}"/>
               </a:ext>
             </a:extLst>
           </p:cNvPr>
@@ -8210,19 +8210,19 @@
           <p:cNvPr id="10" name="">
             <a:extLst xmlns:a="http://schemas.openxmlformats.org/drawingml/2006/main">
               <a:ext uri="{FF2B5EF4-FFF2-40B4-BE49-F238E27FC236}">
-                <a16:creationId xmlns:a16="http://schemas.microsoft.com/office/drawing/2014/main" id="{F478EAAB-3D02-4991-BC85-11912D8A420F}"/>
-              </a:ext>
-            </a:extLst>
-          </p:cNvPr>
-          <p:cNvSpPr>
-            <a:spLocks xmlns:a="http://schemas.openxmlformats.org/drawingml/2006/main" noGrp="1"/>
-          </p:cNvSpPr>
-          <p:nvPr/>
-        </p:nvSpPr>
-        <p:spPr>
-          <a:xfrm xmlns:a="http://schemas.openxmlformats.org/drawingml/2006/main">
-            <a:off x="914400" y="1257300"/>
-            <a:ext cx="10363200" cy="781050"/>
+                <a16:creationId xmlns:a16="http://schemas.microsoft.com/office/drawing/2014/main" id="{78DD485A-D321-4DD6-A99A-6A4FB4F44C20}"/>
+              </a:ext>
+            </a:extLst>
+          </p:cNvPr>
+          <p:cNvSpPr>
+            <a:spLocks xmlns:a="http://schemas.openxmlformats.org/drawingml/2006/main" noGrp="1"/>
+          </p:cNvSpPr>
+          <p:nvPr/>
+        </p:nvSpPr>
+        <p:spPr>
+          <a:xfrm xmlns:a="http://schemas.openxmlformats.org/drawingml/2006/main">
+            <a:off x="857250" y="1219200"/>
+            <a:ext cx="10477500" cy="742950"/>
           </a:xfrm>
           <a:prstGeom xmlns:a="http://schemas.openxmlformats.org/drawingml/2006/main" prst="rect">
             <a:avLst/>
@@ -8239,7 +8239,7 @@
           <a:lstStyle xmlns:a="http://schemas.openxmlformats.org/drawingml/2006/main"/>
           <a:p xmlns:a="http://schemas.openxmlformats.org/drawingml/2006/main">
             <a:pPr algn="ctr">
-              <a:defRPr sz="2175" b="1">
+              <a:defRPr sz="2100" b="1">
                 <a:solidFill>
                   <a:srgbClr val="17253A"/>
                 </a:solidFill>
@@ -8249,7 +8249,7 @@
               </a:defRPr>
             </a:pPr>
             <a:r>
-              <a:rPr sz="2175" b="1">
+              <a:rPr sz="2100" b="1">
                 <a:solidFill>
                   <a:srgbClr val="17253A"/>
                 </a:solidFill>
@@ -8267,28 +8267,30 @@
           <p:cNvPr id="11" name="">
             <a:extLst xmlns:a="http://schemas.openxmlformats.org/drawingml/2006/main">
               <a:ext uri="{FF2B5EF4-FFF2-40B4-BE49-F238E27FC236}">
-                <a16:creationId xmlns:a16="http://schemas.microsoft.com/office/drawing/2014/main" id="{66312C7A-05BB-4A33-A409-6E4FBF69FAB4}"/>
-              </a:ext>
-            </a:extLst>
-          </p:cNvPr>
-          <p:cNvSpPr>
-            <a:spLocks xmlns:a="http://schemas.openxmlformats.org/drawingml/2006/main" noGrp="1"/>
-          </p:cNvSpPr>
-          <p:nvPr/>
-        </p:nvSpPr>
-        <p:spPr>
-          <a:xfrm xmlns:a="http://schemas.openxmlformats.org/drawingml/2006/main">
-            <a:off x="1000125" y="2247900"/>
-            <a:ext cx="476250" cy="476250"/>
-          </a:xfrm>
-          <a:prstGeom xmlns:a="http://schemas.openxmlformats.org/drawingml/2006/main" prst="ellipse">
+                <a16:creationId xmlns:a16="http://schemas.microsoft.com/office/drawing/2014/main" id="{B36CF05D-FD2A-4FA1-9197-4D7349F0FF57}"/>
+              </a:ext>
+            </a:extLst>
+          </p:cNvPr>
+          <p:cNvSpPr>
+            <a:spLocks xmlns:a="http://schemas.openxmlformats.org/drawingml/2006/main" noGrp="1"/>
+          </p:cNvSpPr>
+          <p:nvPr/>
+        </p:nvSpPr>
+        <p:spPr>
+          <a:xfrm xmlns:a="http://schemas.openxmlformats.org/drawingml/2006/main">
+            <a:off x="971550" y="2124075"/>
+            <a:ext cx="38100" cy="3524250"/>
+          </a:xfrm>
+          <a:prstGeom xmlns:a="http://schemas.openxmlformats.org/drawingml/2006/main" prst="rect">
             <a:avLst/>
           </a:prstGeom>
           <a:solidFill xmlns:a="http://schemas.openxmlformats.org/drawingml/2006/main">
-            <a:srgbClr val="18324A"/>
+            <a:srgbClr val="2C6E73"/>
           </a:solidFill>
           <a:ln xmlns:a="http://schemas.openxmlformats.org/drawingml/2006/main" w="0">
-            <a:noFill/>
+            <a:solidFill>
+              <a:srgbClr val="2C6E73"/>
+            </a:solidFill>
           </a:ln>
         </p:spPr>
       </p:sp>
@@ -8297,19 +8299,19 @@
           <p:cNvPr id="12" name="">
             <a:extLst xmlns:a="http://schemas.openxmlformats.org/drawingml/2006/main">
               <a:ext uri="{FF2B5EF4-FFF2-40B4-BE49-F238E27FC236}">
-                <a16:creationId xmlns:a16="http://schemas.microsoft.com/office/drawing/2014/main" id="{7886DFD0-3122-4D4E-B452-57B7FC3B5A0A}"/>
-              </a:ext>
-            </a:extLst>
-          </p:cNvPr>
-          <p:cNvSpPr>
-            <a:spLocks xmlns:a="http://schemas.openxmlformats.org/drawingml/2006/main" noGrp="1"/>
-          </p:cNvSpPr>
-          <p:nvPr/>
-        </p:nvSpPr>
-        <p:spPr>
-          <a:xfrm xmlns:a="http://schemas.openxmlformats.org/drawingml/2006/main">
-            <a:off x="1000125" y="2276475"/>
-            <a:ext cx="476250" cy="419100"/>
+                <a16:creationId xmlns:a16="http://schemas.microsoft.com/office/drawing/2014/main" id="{F495698F-63D3-4D8C-B1B3-064BA5B08028}"/>
+              </a:ext>
+            </a:extLst>
+          </p:cNvPr>
+          <p:cNvSpPr>
+            <a:spLocks xmlns:a="http://schemas.openxmlformats.org/drawingml/2006/main" noGrp="1"/>
+          </p:cNvSpPr>
+          <p:nvPr/>
+        </p:nvSpPr>
+        <p:spPr>
+          <a:xfrm xmlns:a="http://schemas.openxmlformats.org/drawingml/2006/main">
+            <a:off x="1162050" y="2200275"/>
+            <a:ext cx="400050" cy="400050"/>
           </a:xfrm>
           <a:prstGeom xmlns:a="http://schemas.openxmlformats.org/drawingml/2006/main" prst="rect">
             <a:avLst/>
@@ -8326,9 +8328,9 @@
           <a:lstStyle xmlns:a="http://schemas.openxmlformats.org/drawingml/2006/main"/>
           <a:p xmlns:a="http://schemas.openxmlformats.org/drawingml/2006/main">
             <a:pPr algn="ctr">
-              <a:defRPr sz="1350" b="1">
-                <a:solidFill>
-                  <a:srgbClr val="FFFFFF"/>
+              <a:defRPr sz="1125" b="1">
+                <a:solidFill>
+                  <a:srgbClr val="2C6E73"/>
                 </a:solidFill>
                 <a:latin typeface="Arial"/>
                 <a:ea typeface="Arial"/>
@@ -8336,9 +8338,9 @@
               </a:defRPr>
             </a:pPr>
             <a:r>
-              <a:rPr sz="1350" b="1">
-                <a:solidFill>
-                  <a:srgbClr val="FFFFFF"/>
+              <a:rPr sz="1125" b="1">
+                <a:solidFill>
+                  <a:srgbClr val="2C6E73"/>
                 </a:solidFill>
                 <a:latin typeface="Arial"/>
                 <a:ea typeface="Arial"/>
@@ -8354,19 +8356,19 @@
           <p:cNvPr id="13" name="">
             <a:extLst xmlns:a="http://schemas.openxmlformats.org/drawingml/2006/main">
               <a:ext uri="{FF2B5EF4-FFF2-40B4-BE49-F238E27FC236}">
-                <a16:creationId xmlns:a16="http://schemas.microsoft.com/office/drawing/2014/main" id="{B2093D4C-4AB1-458A-A27A-DC1A212C9C12}"/>
-              </a:ext>
-            </a:extLst>
-          </p:cNvPr>
-          <p:cNvSpPr>
-            <a:spLocks xmlns:a="http://schemas.openxmlformats.org/drawingml/2006/main" noGrp="1"/>
-          </p:cNvSpPr>
-          <p:nvPr/>
-        </p:nvSpPr>
-        <p:spPr>
-          <a:xfrm xmlns:a="http://schemas.openxmlformats.org/drawingml/2006/main">
-            <a:off x="1714500" y="2181225"/>
-            <a:ext cx="9429750" cy="609600"/>
+                <a16:creationId xmlns:a16="http://schemas.microsoft.com/office/drawing/2014/main" id="{351EE0CB-583D-4EC0-830E-038612684F33}"/>
+              </a:ext>
+            </a:extLst>
+          </p:cNvPr>
+          <p:cNvSpPr>
+            <a:spLocks xmlns:a="http://schemas.openxmlformats.org/drawingml/2006/main" noGrp="1"/>
+          </p:cNvSpPr>
+          <p:nvPr/>
+        </p:nvSpPr>
+        <p:spPr>
+          <a:xfrm xmlns:a="http://schemas.openxmlformats.org/drawingml/2006/main">
+            <a:off x="1714500" y="2114550"/>
+            <a:ext cx="9525000" cy="809625"/>
           </a:xfrm>
           <a:prstGeom xmlns:a="http://schemas.openxmlformats.org/drawingml/2006/main" prst="rect">
             <a:avLst/>
@@ -8383,7 +8385,7 @@
           <a:lstStyle xmlns:a="http://schemas.openxmlformats.org/drawingml/2006/main"/>
           <a:p xmlns:a="http://schemas.openxmlformats.org/drawingml/2006/main">
             <a:pPr algn="l">
-              <a:defRPr sz="1500" b="0">
+              <a:defRPr sz="1725" b="0">
                 <a:solidFill>
                   <a:srgbClr val="17253A"/>
                 </a:solidFill>
@@ -8393,7 +8395,7 @@
               </a:defRPr>
             </a:pPr>
             <a:r>
-              <a:rPr sz="1500" b="0">
+              <a:rPr sz="1725" b="0">
                 <a:solidFill>
                   <a:srgbClr val="17253A"/>
                 </a:solidFill>
@@ -8401,7 +8403,7 @@
                 <a:ea typeface="Arial"/>
                 <a:cs typeface="Arial"/>
               </a:rPr>
-              <a:t>Identify the structure: Keep both sides balanced and identify the outer operation.</a:t>
+              <a:t>x + 38 = 91</a:t>
             </a:r>
           </a:p>
         </p:txBody>
@@ -8411,28 +8413,30 @@
           <p:cNvPr id="14" name="">
             <a:extLst xmlns:a="http://schemas.openxmlformats.org/drawingml/2006/main">
               <a:ext uri="{FF2B5EF4-FFF2-40B4-BE49-F238E27FC236}">
-                <a16:creationId xmlns:a16="http://schemas.microsoft.com/office/drawing/2014/main" id="{9BEADAC1-FC73-4590-B077-4F382CA443A8}"/>
-              </a:ext>
-            </a:extLst>
-          </p:cNvPr>
-          <p:cNvSpPr>
-            <a:spLocks xmlns:a="http://schemas.openxmlformats.org/drawingml/2006/main" noGrp="1"/>
-          </p:cNvSpPr>
-          <p:nvPr/>
-        </p:nvSpPr>
-        <p:spPr>
-          <a:xfrm xmlns:a="http://schemas.openxmlformats.org/drawingml/2006/main">
-            <a:off x="1000125" y="2990850"/>
-            <a:ext cx="476250" cy="476250"/>
-          </a:xfrm>
-          <a:prstGeom xmlns:a="http://schemas.openxmlformats.org/drawingml/2006/main" prst="ellipse">
+                <a16:creationId xmlns:a16="http://schemas.microsoft.com/office/drawing/2014/main" id="{6C98B232-6289-4A65-95EC-58156F53C6CD}"/>
+              </a:ext>
+            </a:extLst>
+          </p:cNvPr>
+          <p:cNvSpPr>
+            <a:spLocks xmlns:a="http://schemas.openxmlformats.org/drawingml/2006/main" noGrp="1"/>
+          </p:cNvSpPr>
+          <p:nvPr/>
+        </p:nvSpPr>
+        <p:spPr>
+          <a:xfrm xmlns:a="http://schemas.openxmlformats.org/drawingml/2006/main">
+            <a:off x="1714500" y="2943225"/>
+            <a:ext cx="9334500" cy="9525"/>
+          </a:xfrm>
+          <a:prstGeom xmlns:a="http://schemas.openxmlformats.org/drawingml/2006/main" prst="rect">
             <a:avLst/>
           </a:prstGeom>
           <a:solidFill xmlns:a="http://schemas.openxmlformats.org/drawingml/2006/main">
-            <a:srgbClr val="2C6E73"/>
+            <a:srgbClr val="D9E0E6"/>
           </a:solidFill>
           <a:ln xmlns:a="http://schemas.openxmlformats.org/drawingml/2006/main" w="0">
-            <a:noFill/>
+            <a:solidFill>
+              <a:srgbClr val="D9E0E6"/>
+            </a:solidFill>
           </a:ln>
         </p:spPr>
       </p:sp>
@@ -8441,19 +8445,19 @@
           <p:cNvPr id="15" name="">
             <a:extLst xmlns:a="http://schemas.openxmlformats.org/drawingml/2006/main">
               <a:ext uri="{FF2B5EF4-FFF2-40B4-BE49-F238E27FC236}">
-                <a16:creationId xmlns:a16="http://schemas.microsoft.com/office/drawing/2014/main" id="{F6B60436-A2B4-48FD-9541-27087932E38A}"/>
-              </a:ext>
-            </a:extLst>
-          </p:cNvPr>
-          <p:cNvSpPr>
-            <a:spLocks xmlns:a="http://schemas.openxmlformats.org/drawingml/2006/main" noGrp="1"/>
-          </p:cNvSpPr>
-          <p:nvPr/>
-        </p:nvSpPr>
-        <p:spPr>
-          <a:xfrm xmlns:a="http://schemas.openxmlformats.org/drawingml/2006/main">
-            <a:off x="1000125" y="3019425"/>
-            <a:ext cx="476250" cy="419100"/>
+                <a16:creationId xmlns:a16="http://schemas.microsoft.com/office/drawing/2014/main" id="{E743E251-FA40-4F22-8C0D-F13F97FC9DBE}"/>
+              </a:ext>
+            </a:extLst>
+          </p:cNvPr>
+          <p:cNvSpPr>
+            <a:spLocks xmlns:a="http://schemas.openxmlformats.org/drawingml/2006/main" noGrp="1"/>
+          </p:cNvSpPr>
+          <p:nvPr/>
+        </p:nvSpPr>
+        <p:spPr>
+          <a:xfrm xmlns:a="http://schemas.openxmlformats.org/drawingml/2006/main">
+            <a:off x="1162050" y="3076575"/>
+            <a:ext cx="400050" cy="400050"/>
           </a:xfrm>
           <a:prstGeom xmlns:a="http://schemas.openxmlformats.org/drawingml/2006/main" prst="rect">
             <a:avLst/>
@@ -8470,9 +8474,9 @@
           <a:lstStyle xmlns:a="http://schemas.openxmlformats.org/drawingml/2006/main"/>
           <a:p xmlns:a="http://schemas.openxmlformats.org/drawingml/2006/main">
             <a:pPr algn="ctr">
-              <a:defRPr sz="1350" b="1">
-                <a:solidFill>
-                  <a:srgbClr val="FFFFFF"/>
+              <a:defRPr sz="1125" b="1">
+                <a:solidFill>
+                  <a:srgbClr val="2C6E73"/>
                 </a:solidFill>
                 <a:latin typeface="Arial"/>
                 <a:ea typeface="Arial"/>
@@ -8480,9 +8484,9 @@
               </a:defRPr>
             </a:pPr>
             <a:r>
-              <a:rPr sz="1350" b="1">
-                <a:solidFill>
-                  <a:srgbClr val="FFFFFF"/>
+              <a:rPr sz="1125" b="1">
+                <a:solidFill>
+                  <a:srgbClr val="2C6E73"/>
                 </a:solidFill>
                 <a:latin typeface="Arial"/>
                 <a:ea typeface="Arial"/>
@@ -8498,19 +8502,19 @@
           <p:cNvPr id="16" name="">
             <a:extLst xmlns:a="http://schemas.openxmlformats.org/drawingml/2006/main">
               <a:ext uri="{FF2B5EF4-FFF2-40B4-BE49-F238E27FC236}">
-                <a16:creationId xmlns:a16="http://schemas.microsoft.com/office/drawing/2014/main" id="{0D602755-037D-4000-9730-1E375A7AB61F}"/>
-              </a:ext>
-            </a:extLst>
-          </p:cNvPr>
-          <p:cNvSpPr>
-            <a:spLocks xmlns:a="http://schemas.openxmlformats.org/drawingml/2006/main" noGrp="1"/>
-          </p:cNvSpPr>
-          <p:nvPr/>
-        </p:nvSpPr>
-        <p:spPr>
-          <a:xfrm xmlns:a="http://schemas.openxmlformats.org/drawingml/2006/main">
-            <a:off x="1714500" y="2924175"/>
-            <a:ext cx="9429750" cy="609600"/>
+                <a16:creationId xmlns:a16="http://schemas.microsoft.com/office/drawing/2014/main" id="{7EBD45FB-810D-4E18-831B-CE6D411504B2}"/>
+              </a:ext>
+            </a:extLst>
+          </p:cNvPr>
+          <p:cNvSpPr>
+            <a:spLocks xmlns:a="http://schemas.openxmlformats.org/drawingml/2006/main" noGrp="1"/>
+          </p:cNvSpPr>
+          <p:nvPr/>
+        </p:nvSpPr>
+        <p:spPr>
+          <a:xfrm xmlns:a="http://schemas.openxmlformats.org/drawingml/2006/main">
+            <a:off x="1714500" y="2990850"/>
+            <a:ext cx="9525000" cy="809625"/>
           </a:xfrm>
           <a:prstGeom xmlns:a="http://schemas.openxmlformats.org/drawingml/2006/main" prst="rect">
             <a:avLst/>
@@ -8527,7 +8531,7 @@
           <a:lstStyle xmlns:a="http://schemas.openxmlformats.org/drawingml/2006/main"/>
           <a:p xmlns:a="http://schemas.openxmlformats.org/drawingml/2006/main">
             <a:pPr algn="l">
-              <a:defRPr sz="1500" b="0">
+              <a:defRPr sz="1725" b="0">
                 <a:solidFill>
                   <a:srgbClr val="17253A"/>
                 </a:solidFill>
@@ -8537,7 +8541,7 @@
               </a:defRPr>
             </a:pPr>
             <a:r>
-              <a:rPr sz="1500" b="0">
+              <a:rPr sz="1725" b="0">
                 <a:solidFill>
                   <a:srgbClr val="17253A"/>
                 </a:solidFill>
@@ -8545,7 +8549,7 @@
                 <a:ea typeface="Arial"/>
                 <a:cs typeface="Arial"/>
               </a:rPr>
-              <a:t>Set up the method: Undo operations in reverse order.</a:t>
+              <a:t>Subtract 38 from both sides</a:t>
             </a:r>
           </a:p>
         </p:txBody>
@@ -8555,28 +8559,30 @@
           <p:cNvPr id="17" name="">
             <a:extLst xmlns:a="http://schemas.openxmlformats.org/drawingml/2006/main">
               <a:ext uri="{FF2B5EF4-FFF2-40B4-BE49-F238E27FC236}">
-                <a16:creationId xmlns:a16="http://schemas.microsoft.com/office/drawing/2014/main" id="{E4D8C8D7-5D7C-4FD1-9D01-1C2DB7C014CD}"/>
-              </a:ext>
-            </a:extLst>
-          </p:cNvPr>
-          <p:cNvSpPr>
-            <a:spLocks xmlns:a="http://schemas.openxmlformats.org/drawingml/2006/main" noGrp="1"/>
-          </p:cNvSpPr>
-          <p:nvPr/>
-        </p:nvSpPr>
-        <p:spPr>
-          <a:xfrm xmlns:a="http://schemas.openxmlformats.org/drawingml/2006/main">
-            <a:off x="1000125" y="3733800"/>
-            <a:ext cx="476250" cy="476250"/>
-          </a:xfrm>
-          <a:prstGeom xmlns:a="http://schemas.openxmlformats.org/drawingml/2006/main" prst="ellipse">
+                <a16:creationId xmlns:a16="http://schemas.microsoft.com/office/drawing/2014/main" id="{E363DF89-94C0-48EE-890F-1F84DE80288A}"/>
+              </a:ext>
+            </a:extLst>
+          </p:cNvPr>
+          <p:cNvSpPr>
+            <a:spLocks xmlns:a="http://schemas.openxmlformats.org/drawingml/2006/main" noGrp="1"/>
+          </p:cNvSpPr>
+          <p:nvPr/>
+        </p:nvSpPr>
+        <p:spPr>
+          <a:xfrm xmlns:a="http://schemas.openxmlformats.org/drawingml/2006/main">
+            <a:off x="1714500" y="3819525"/>
+            <a:ext cx="9334500" cy="9525"/>
+          </a:xfrm>
+          <a:prstGeom xmlns:a="http://schemas.openxmlformats.org/drawingml/2006/main" prst="rect">
             <a:avLst/>
           </a:prstGeom>
           <a:solidFill xmlns:a="http://schemas.openxmlformats.org/drawingml/2006/main">
-            <a:srgbClr val="2C6E73"/>
+            <a:srgbClr val="D9E0E6"/>
           </a:solidFill>
           <a:ln xmlns:a="http://schemas.openxmlformats.org/drawingml/2006/main" w="0">
-            <a:noFill/>
+            <a:solidFill>
+              <a:srgbClr val="D9E0E6"/>
+            </a:solidFill>
           </a:ln>
         </p:spPr>
       </p:sp>
@@ -8585,19 +8591,19 @@
           <p:cNvPr id="18" name="">
             <a:extLst xmlns:a="http://schemas.openxmlformats.org/drawingml/2006/main">
               <a:ext uri="{FF2B5EF4-FFF2-40B4-BE49-F238E27FC236}">
-                <a16:creationId xmlns:a16="http://schemas.microsoft.com/office/drawing/2014/main" id="{4ADAD434-B13E-49FD-BA27-E8C8FFAB606D}"/>
-              </a:ext>
-            </a:extLst>
-          </p:cNvPr>
-          <p:cNvSpPr>
-            <a:spLocks xmlns:a="http://schemas.openxmlformats.org/drawingml/2006/main" noGrp="1"/>
-          </p:cNvSpPr>
-          <p:nvPr/>
-        </p:nvSpPr>
-        <p:spPr>
-          <a:xfrm xmlns:a="http://schemas.openxmlformats.org/drawingml/2006/main">
-            <a:off x="1000125" y="3762375"/>
-            <a:ext cx="476250" cy="419100"/>
+                <a16:creationId xmlns:a16="http://schemas.microsoft.com/office/drawing/2014/main" id="{7F41673F-FBE4-482C-A775-4E9B3FCABF21}"/>
+              </a:ext>
+            </a:extLst>
+          </p:cNvPr>
+          <p:cNvSpPr>
+            <a:spLocks xmlns:a="http://schemas.openxmlformats.org/drawingml/2006/main" noGrp="1"/>
+          </p:cNvSpPr>
+          <p:nvPr/>
+        </p:nvSpPr>
+        <p:spPr>
+          <a:xfrm xmlns:a="http://schemas.openxmlformats.org/drawingml/2006/main">
+            <a:off x="1162050" y="3952875"/>
+            <a:ext cx="400050" cy="400050"/>
           </a:xfrm>
           <a:prstGeom xmlns:a="http://schemas.openxmlformats.org/drawingml/2006/main" prst="rect">
             <a:avLst/>
@@ -8614,9 +8620,9 @@
           <a:lstStyle xmlns:a="http://schemas.openxmlformats.org/drawingml/2006/main"/>
           <a:p xmlns:a="http://schemas.openxmlformats.org/drawingml/2006/main">
             <a:pPr algn="ctr">
-              <a:defRPr sz="1350" b="1">
-                <a:solidFill>
-                  <a:srgbClr val="FFFFFF"/>
+              <a:defRPr sz="1125" b="1">
+                <a:solidFill>
+                  <a:srgbClr val="2C6E73"/>
                 </a:solidFill>
                 <a:latin typeface="Arial"/>
                 <a:ea typeface="Arial"/>
@@ -8624,9 +8630,9 @@
               </a:defRPr>
             </a:pPr>
             <a:r>
-              <a:rPr sz="1350" b="1">
-                <a:solidFill>
-                  <a:srgbClr val="FFFFFF"/>
+              <a:rPr sz="1125" b="1">
+                <a:solidFill>
+                  <a:srgbClr val="2C6E73"/>
                 </a:solidFill>
                 <a:latin typeface="Arial"/>
                 <a:ea typeface="Arial"/>
@@ -8642,19 +8648,19 @@
           <p:cNvPr id="19" name="">
             <a:extLst xmlns:a="http://schemas.openxmlformats.org/drawingml/2006/main">
               <a:ext uri="{FF2B5EF4-FFF2-40B4-BE49-F238E27FC236}">
-                <a16:creationId xmlns:a16="http://schemas.microsoft.com/office/drawing/2014/main" id="{6E594035-E52C-4EB8-AC66-F0A04F152CB1}"/>
-              </a:ext>
-            </a:extLst>
-          </p:cNvPr>
-          <p:cNvSpPr>
-            <a:spLocks xmlns:a="http://schemas.openxmlformats.org/drawingml/2006/main" noGrp="1"/>
-          </p:cNvSpPr>
-          <p:nvPr/>
-        </p:nvSpPr>
-        <p:spPr>
-          <a:xfrm xmlns:a="http://schemas.openxmlformats.org/drawingml/2006/main">
-            <a:off x="1714500" y="3667125"/>
-            <a:ext cx="9429750" cy="609600"/>
+                <a16:creationId xmlns:a16="http://schemas.microsoft.com/office/drawing/2014/main" id="{C0C30B2A-9927-4510-89A6-B2E08194845C}"/>
+              </a:ext>
+            </a:extLst>
+          </p:cNvPr>
+          <p:cNvSpPr>
+            <a:spLocks xmlns:a="http://schemas.openxmlformats.org/drawingml/2006/main" noGrp="1"/>
+          </p:cNvSpPr>
+          <p:nvPr/>
+        </p:nvSpPr>
+        <p:spPr>
+          <a:xfrm xmlns:a="http://schemas.openxmlformats.org/drawingml/2006/main">
+            <a:off x="1714500" y="3867150"/>
+            <a:ext cx="9525000" cy="809625"/>
           </a:xfrm>
           <a:prstGeom xmlns:a="http://schemas.openxmlformats.org/drawingml/2006/main" prst="rect">
             <a:avLst/>
@@ -8671,7 +8677,7 @@
           <a:lstStyle xmlns:a="http://schemas.openxmlformats.org/drawingml/2006/main"/>
           <a:p xmlns:a="http://schemas.openxmlformats.org/drawingml/2006/main">
             <a:pPr algn="l">
-              <a:defRPr sz="1500" b="0">
+              <a:defRPr sz="1725" b="0">
                 <a:solidFill>
                   <a:srgbClr val="17253A"/>
                 </a:solidFill>
@@ -8681,7 +8687,7 @@
               </a:defRPr>
             </a:pPr>
             <a:r>
-              <a:rPr sz="1500" b="0">
+              <a:rPr sz="1725" b="0">
                 <a:solidFill>
                   <a:srgbClr val="17253A"/>
                 </a:solidFill>
@@ -8689,7 +8695,7 @@
                 <a:ea typeface="Arial"/>
                 <a:cs typeface="Arial"/>
               </a:rPr>
-              <a:t>Complete the calculation: x = 53.</a:t>
+              <a:t>x = 91 - 38</a:t>
             </a:r>
           </a:p>
         </p:txBody>
@@ -8699,28 +8705,30 @@
           <p:cNvPr id="20" name="">
             <a:extLst xmlns:a="http://schemas.openxmlformats.org/drawingml/2006/main">
               <a:ext uri="{FF2B5EF4-FFF2-40B4-BE49-F238E27FC236}">
-                <a16:creationId xmlns:a16="http://schemas.microsoft.com/office/drawing/2014/main" id="{D9532D33-1C85-44FD-B080-1A221AD76A8E}"/>
-              </a:ext>
-            </a:extLst>
-          </p:cNvPr>
-          <p:cNvSpPr>
-            <a:spLocks xmlns:a="http://schemas.openxmlformats.org/drawingml/2006/main" noGrp="1"/>
-          </p:cNvSpPr>
-          <p:nvPr/>
-        </p:nvSpPr>
-        <p:spPr>
-          <a:xfrm xmlns:a="http://schemas.openxmlformats.org/drawingml/2006/main">
-            <a:off x="1000125" y="4476750"/>
-            <a:ext cx="476250" cy="476250"/>
-          </a:xfrm>
-          <a:prstGeom xmlns:a="http://schemas.openxmlformats.org/drawingml/2006/main" prst="ellipse">
+                <a16:creationId xmlns:a16="http://schemas.microsoft.com/office/drawing/2014/main" id="{3B89AC6F-B5E2-48A7-8DD6-4075A188DDAC}"/>
+              </a:ext>
+            </a:extLst>
+          </p:cNvPr>
+          <p:cNvSpPr>
+            <a:spLocks xmlns:a="http://schemas.openxmlformats.org/drawingml/2006/main" noGrp="1"/>
+          </p:cNvSpPr>
+          <p:nvPr/>
+        </p:nvSpPr>
+        <p:spPr>
+          <a:xfrm xmlns:a="http://schemas.openxmlformats.org/drawingml/2006/main">
+            <a:off x="1714500" y="4695825"/>
+            <a:ext cx="9334500" cy="9525"/>
+          </a:xfrm>
+          <a:prstGeom xmlns:a="http://schemas.openxmlformats.org/drawingml/2006/main" prst="rect">
             <a:avLst/>
           </a:prstGeom>
           <a:solidFill xmlns:a="http://schemas.openxmlformats.org/drawingml/2006/main">
-            <a:srgbClr val="2C6E73"/>
+            <a:srgbClr val="D9E0E6"/>
           </a:solidFill>
           <a:ln xmlns:a="http://schemas.openxmlformats.org/drawingml/2006/main" w="0">
-            <a:noFill/>
+            <a:solidFill>
+              <a:srgbClr val="D9E0E6"/>
+            </a:solidFill>
           </a:ln>
         </p:spPr>
       </p:sp>
@@ -8729,19 +8737,19 @@
           <p:cNvPr id="21" name="">
             <a:extLst xmlns:a="http://schemas.openxmlformats.org/drawingml/2006/main">
               <a:ext uri="{FF2B5EF4-FFF2-40B4-BE49-F238E27FC236}">
-                <a16:creationId xmlns:a16="http://schemas.microsoft.com/office/drawing/2014/main" id="{D9658EE7-1544-4009-8D7D-B63AD66F6202}"/>
-              </a:ext>
-            </a:extLst>
-          </p:cNvPr>
-          <p:cNvSpPr>
-            <a:spLocks xmlns:a="http://schemas.openxmlformats.org/drawingml/2006/main" noGrp="1"/>
-          </p:cNvSpPr>
-          <p:nvPr/>
-        </p:nvSpPr>
-        <p:spPr>
-          <a:xfrm xmlns:a="http://schemas.openxmlformats.org/drawingml/2006/main">
-            <a:off x="1000125" y="4505325"/>
-            <a:ext cx="476250" cy="419100"/>
+                <a16:creationId xmlns:a16="http://schemas.microsoft.com/office/drawing/2014/main" id="{94294EDB-2BD4-4E48-94CB-9A1D23B44A2B}"/>
+              </a:ext>
+            </a:extLst>
+          </p:cNvPr>
+          <p:cNvSpPr>
+            <a:spLocks xmlns:a="http://schemas.openxmlformats.org/drawingml/2006/main" noGrp="1"/>
+          </p:cNvSpPr>
+          <p:nvPr/>
+        </p:nvSpPr>
+        <p:spPr>
+          <a:xfrm xmlns:a="http://schemas.openxmlformats.org/drawingml/2006/main">
+            <a:off x="1162050" y="4829175"/>
+            <a:ext cx="400050" cy="400050"/>
           </a:xfrm>
           <a:prstGeom xmlns:a="http://schemas.openxmlformats.org/drawingml/2006/main" prst="rect">
             <a:avLst/>
@@ -8758,9 +8766,9 @@
           <a:lstStyle xmlns:a="http://schemas.openxmlformats.org/drawingml/2006/main"/>
           <a:p xmlns:a="http://schemas.openxmlformats.org/drawingml/2006/main">
             <a:pPr algn="ctr">
-              <a:defRPr sz="1350" b="1">
-                <a:solidFill>
-                  <a:srgbClr val="FFFFFF"/>
+              <a:defRPr sz="1125" b="1">
+                <a:solidFill>
+                  <a:srgbClr val="2F785D"/>
                 </a:solidFill>
                 <a:latin typeface="Arial"/>
                 <a:ea typeface="Arial"/>
@@ -8768,9 +8776,9 @@
               </a:defRPr>
             </a:pPr>
             <a:r>
-              <a:rPr sz="1350" b="1">
-                <a:solidFill>
-                  <a:srgbClr val="FFFFFF"/>
+              <a:rPr sz="1125" b="1">
+                <a:solidFill>
+                  <a:srgbClr val="2F785D"/>
                 </a:solidFill>
                 <a:latin typeface="Arial"/>
                 <a:ea typeface="Arial"/>
@@ -8786,19 +8794,19 @@
           <p:cNvPr id="22" name="">
             <a:extLst xmlns:a="http://schemas.openxmlformats.org/drawingml/2006/main">
               <a:ext uri="{FF2B5EF4-FFF2-40B4-BE49-F238E27FC236}">
-                <a16:creationId xmlns:a16="http://schemas.microsoft.com/office/drawing/2014/main" id="{B91909E3-1F71-4BD3-B175-62BA4F59F6C5}"/>
-              </a:ext>
-            </a:extLst>
-          </p:cNvPr>
-          <p:cNvSpPr>
-            <a:spLocks xmlns:a="http://schemas.openxmlformats.org/drawingml/2006/main" noGrp="1"/>
-          </p:cNvSpPr>
-          <p:nvPr/>
-        </p:nvSpPr>
-        <p:spPr>
-          <a:xfrm xmlns:a="http://schemas.openxmlformats.org/drawingml/2006/main">
-            <a:off x="1714500" y="4410075"/>
-            <a:ext cx="9429750" cy="609600"/>
+                <a16:creationId xmlns:a16="http://schemas.microsoft.com/office/drawing/2014/main" id="{B528F20F-3A15-48D1-9453-0BB4F5018633}"/>
+              </a:ext>
+            </a:extLst>
+          </p:cNvPr>
+          <p:cNvSpPr>
+            <a:spLocks xmlns:a="http://schemas.openxmlformats.org/drawingml/2006/main" noGrp="1"/>
+          </p:cNvSpPr>
+          <p:nvPr/>
+        </p:nvSpPr>
+        <p:spPr>
+          <a:xfrm xmlns:a="http://schemas.openxmlformats.org/drawingml/2006/main">
+            <a:off x="1714500" y="4743450"/>
+            <a:ext cx="9525000" cy="809625"/>
           </a:xfrm>
           <a:prstGeom xmlns:a="http://schemas.openxmlformats.org/drawingml/2006/main" prst="rect">
             <a:avLst/>
@@ -8815,7 +8823,7 @@
           <a:lstStyle xmlns:a="http://schemas.openxmlformats.org/drawingml/2006/main"/>
           <a:p xmlns:a="http://schemas.openxmlformats.org/drawingml/2006/main">
             <a:pPr algn="l">
-              <a:defRPr sz="1500" b="1">
+              <a:defRPr sz="1725" b="1">
                 <a:solidFill>
                   <a:srgbClr val="2F785D"/>
                 </a:solidFill>
@@ -8825,7 +8833,7 @@
               </a:defRPr>
             </a:pPr>
             <a:r>
-              <a:rPr sz="1500" b="1">
+              <a:rPr sz="1725" b="1">
                 <a:solidFill>
                   <a:srgbClr val="2F785D"/>
                 </a:solidFill>
@@ -8833,7 +8841,7 @@
                 <a:ea typeface="Arial"/>
                 <a:cs typeface="Arial"/>
               </a:rPr>
-              <a:t>Check the result: Substitute the solution to check the original equation.</a:t>
+              <a:t>x = 53</a:t>
             </a:r>
           </a:p>
         </p:txBody>
@@ -8841,7 +8849,7 @@
     </p:spTree>
     <p:extLst>
       <p:ext uri="{BB962C8B-B14F-4D97-AF65-F5344CB8AC3E}">
-        <p14:creationId xmlns:p14="http://schemas.microsoft.com/office/powerpoint/2010/main" val="667379778"/>
+        <p14:creationId xmlns:p14="http://schemas.microsoft.com/office/powerpoint/2010/main" val="473803454"/>
       </p:ext>
     </p:extLst>
   </p:cSld>
@@ -9134,7 +9142,7 @@
           <p:cNvPr id="15" name="">
             <a:extLst xmlns:a="http://schemas.openxmlformats.org/drawingml/2006/main">
               <a:ext uri="{FF2B5EF4-FFF2-40B4-BE49-F238E27FC236}">
-                <a16:creationId xmlns:a16="http://schemas.microsoft.com/office/drawing/2014/main" id="{019C6BB9-0D8B-432D-AE9E-2905833FAD85}"/>
+                <a16:creationId xmlns:a16="http://schemas.microsoft.com/office/drawing/2014/main" id="{330DD60C-5BEA-4215-A45C-C6C73B6E0C98}"/>
               </a:ext>
             </a:extLst>
           </p:cNvPr>
@@ -9166,7 +9174,7 @@
           <p:cNvPr id="2" name="">
             <a:extLst xmlns:a="http://schemas.openxmlformats.org/drawingml/2006/main">
               <a:ext uri="{FF2B5EF4-FFF2-40B4-BE49-F238E27FC236}">
-                <a16:creationId xmlns:a16="http://schemas.microsoft.com/office/drawing/2014/main" id="{A80E324D-8DC0-4C9C-BA9C-ECCBA05EFCF1}"/>
+                <a16:creationId xmlns:a16="http://schemas.microsoft.com/office/drawing/2014/main" id="{97545A90-4A0B-4B0F-9701-34A9394B4CCC}"/>
               </a:ext>
             </a:extLst>
           </p:cNvPr>
@@ -9223,7 +9231,7 @@
           <p:cNvPr id="3" name="">
             <a:extLst xmlns:a="http://schemas.openxmlformats.org/drawingml/2006/main">
               <a:ext uri="{FF2B5EF4-FFF2-40B4-BE49-F238E27FC236}">
-                <a16:creationId xmlns:a16="http://schemas.microsoft.com/office/drawing/2014/main" id="{84BC0051-E94D-4EAD-8C5C-BA0D4AE90501}"/>
+                <a16:creationId xmlns:a16="http://schemas.microsoft.com/office/drawing/2014/main" id="{325DC123-C728-48B4-A7E0-96BA23944469}"/>
               </a:ext>
             </a:extLst>
           </p:cNvPr>
@@ -9255,7 +9263,7 @@
           <p:cNvPr id="4" name="">
             <a:extLst xmlns:a="http://schemas.openxmlformats.org/drawingml/2006/main">
               <a:ext uri="{FF2B5EF4-FFF2-40B4-BE49-F238E27FC236}">
-                <a16:creationId xmlns:a16="http://schemas.microsoft.com/office/drawing/2014/main" id="{A817891D-919F-4999-A24C-F678B5821C31}"/>
+                <a16:creationId xmlns:a16="http://schemas.microsoft.com/office/drawing/2014/main" id="{420881CA-6D65-4474-B37D-5E676B1165D8}"/>
               </a:ext>
             </a:extLst>
           </p:cNvPr>
@@ -9312,7 +9320,7 @@
           <p:cNvPr id="5" name="">
             <a:extLst xmlns:a="http://schemas.openxmlformats.org/drawingml/2006/main">
               <a:ext uri="{FF2B5EF4-FFF2-40B4-BE49-F238E27FC236}">
-                <a16:creationId xmlns:a16="http://schemas.microsoft.com/office/drawing/2014/main" id="{F1BAADF0-7E44-45A3-BA4F-1E93058151C2}"/>
+                <a16:creationId xmlns:a16="http://schemas.microsoft.com/office/drawing/2014/main" id="{7E4798EC-8804-42FE-AE24-5F348BCB0F0F}"/>
               </a:ext>
             </a:extLst>
           </p:cNvPr>
@@ -9369,7 +9377,7 @@
           <p:cNvPr id="6" name="">
             <a:extLst xmlns:a="http://schemas.openxmlformats.org/drawingml/2006/main">
               <a:ext uri="{FF2B5EF4-FFF2-40B4-BE49-F238E27FC236}">
-                <a16:creationId xmlns:a16="http://schemas.microsoft.com/office/drawing/2014/main" id="{66001F8E-516D-4916-A486-F9C51237E665}"/>
+                <a16:creationId xmlns:a16="http://schemas.microsoft.com/office/drawing/2014/main" id="{BA599995-0A62-4A40-B6C8-82B6593F2254}"/>
               </a:ext>
             </a:extLst>
           </p:cNvPr>
@@ -9426,7 +9434,7 @@
           <p:cNvPr id="7" name="">
             <a:extLst xmlns:a="http://schemas.openxmlformats.org/drawingml/2006/main">
               <a:ext uri="{FF2B5EF4-FFF2-40B4-BE49-F238E27FC236}">
-                <a16:creationId xmlns:a16="http://schemas.microsoft.com/office/drawing/2014/main" id="{38E6AD77-A558-452B-9BF1-57062A7FEB15}"/>
+                <a16:creationId xmlns:a16="http://schemas.microsoft.com/office/drawing/2014/main" id="{DB8B89E7-CA82-44E3-87B3-749DF4D087C3}"/>
               </a:ext>
             </a:extLst>
           </p:cNvPr>
@@ -9458,7 +9466,7 @@
           <p:cNvPr id="8" name="">
             <a:extLst xmlns:a="http://schemas.openxmlformats.org/drawingml/2006/main">
               <a:ext uri="{FF2B5EF4-FFF2-40B4-BE49-F238E27FC236}">
-                <a16:creationId xmlns:a16="http://schemas.microsoft.com/office/drawing/2014/main" id="{012EBA14-6076-4BF9-8B8E-75249C83680F}"/>
+                <a16:creationId xmlns:a16="http://schemas.microsoft.com/office/drawing/2014/main" id="{D809C7B2-87EA-40CA-9C48-9AA299CF293D}"/>
               </a:ext>
             </a:extLst>
           </p:cNvPr>
@@ -9515,7 +9523,7 @@
           <p:cNvPr id="9" name="">
             <a:extLst xmlns:a="http://schemas.openxmlformats.org/drawingml/2006/main">
               <a:ext uri="{FF2B5EF4-FFF2-40B4-BE49-F238E27FC236}">
-                <a16:creationId xmlns:a16="http://schemas.microsoft.com/office/drawing/2014/main" id="{AC53429B-1BE0-4385-A447-463C81AD29C6}"/>
+                <a16:creationId xmlns:a16="http://schemas.microsoft.com/office/drawing/2014/main" id="{5B5E2FAF-8675-496F-8701-F8A993E6EA92}"/>
               </a:ext>
             </a:extLst>
           </p:cNvPr>
@@ -9572,7 +9580,7 @@
           <p:cNvPr id="10" name="">
             <a:extLst xmlns:a="http://schemas.openxmlformats.org/drawingml/2006/main">
               <a:ext uri="{FF2B5EF4-FFF2-40B4-BE49-F238E27FC236}">
-                <a16:creationId xmlns:a16="http://schemas.microsoft.com/office/drawing/2014/main" id="{E518E452-E0E8-4311-A182-53792C400B8F}"/>
+                <a16:creationId xmlns:a16="http://schemas.microsoft.com/office/drawing/2014/main" id="{6D19603E-D17B-4EEB-A0FE-077C9233076C}"/>
               </a:ext>
             </a:extLst>
           </p:cNvPr>
@@ -9629,7 +9637,7 @@
           <p:cNvPr id="11" name="">
             <a:extLst xmlns:a="http://schemas.openxmlformats.org/drawingml/2006/main">
               <a:ext uri="{FF2B5EF4-FFF2-40B4-BE49-F238E27FC236}">
-                <a16:creationId xmlns:a16="http://schemas.microsoft.com/office/drawing/2014/main" id="{36FEDF18-F0FF-476E-AACF-54FD95EA7E37}"/>
+                <a16:creationId xmlns:a16="http://schemas.microsoft.com/office/drawing/2014/main" id="{1AFAEDBC-B659-443A-9A54-6D71147D75DE}"/>
               </a:ext>
             </a:extLst>
           </p:cNvPr>
@@ -9686,7 +9694,7 @@
           <p:cNvPr id="12" name="">
             <a:extLst xmlns:a="http://schemas.openxmlformats.org/drawingml/2006/main">
               <a:ext uri="{FF2B5EF4-FFF2-40B4-BE49-F238E27FC236}">
-                <a16:creationId xmlns:a16="http://schemas.microsoft.com/office/drawing/2014/main" id="{4EF080CF-D987-415A-984D-6BC3F063EABF}"/>
+                <a16:creationId xmlns:a16="http://schemas.microsoft.com/office/drawing/2014/main" id="{6ED6304D-91A8-4264-A633-62DC21A94F78}"/>
               </a:ext>
             </a:extLst>
           </p:cNvPr>
@@ -9718,7 +9726,7 @@
           <p:cNvPr id="13" name="">
             <a:extLst xmlns:a="http://schemas.openxmlformats.org/drawingml/2006/main">
               <a:ext uri="{FF2B5EF4-FFF2-40B4-BE49-F238E27FC236}">
-                <a16:creationId xmlns:a16="http://schemas.microsoft.com/office/drawing/2014/main" id="{AE607C30-E6CD-412C-8B31-2EFE8F672FA0}"/>
+                <a16:creationId xmlns:a16="http://schemas.microsoft.com/office/drawing/2014/main" id="{EF1DD454-3C03-4CB6-88AC-BA2C6F3FA1BD}"/>
               </a:ext>
             </a:extLst>
           </p:cNvPr>
@@ -9775,7 +9783,7 @@
           <p:cNvPr id="14" name="">
             <a:extLst xmlns:a="http://schemas.openxmlformats.org/drawingml/2006/main">
               <a:ext uri="{FF2B5EF4-FFF2-40B4-BE49-F238E27FC236}">
-                <a16:creationId xmlns:a16="http://schemas.microsoft.com/office/drawing/2014/main" id="{3B43BB68-DDD8-4D56-80F4-070E10F00487}"/>
+                <a16:creationId xmlns:a16="http://schemas.microsoft.com/office/drawing/2014/main" id="{8B32C263-2923-45C1-8ECE-22BE6794E658}"/>
               </a:ext>
             </a:extLst>
           </p:cNvPr>
@@ -9830,7 +9838,7 @@
     </p:spTree>
     <p:extLst>
       <p:ext uri="{BB962C8B-B14F-4D97-AF65-F5344CB8AC3E}">
-        <p14:creationId xmlns:p14="http://schemas.microsoft.com/office/powerpoint/2010/main" val="1330617213"/>
+        <p14:creationId xmlns:p14="http://schemas.microsoft.com/office/powerpoint/2010/main" val="1606877790"/>
       </p:ext>
     </p:extLst>
   </p:cSld>
@@ -10031,7 +10039,7 @@
           <p:cNvPr id="16" name="">
             <a:extLst xmlns:a="http://schemas.openxmlformats.org/drawingml/2006/main">
               <a:ext uri="{FF2B5EF4-FFF2-40B4-BE49-F238E27FC236}">
-                <a16:creationId xmlns:a16="http://schemas.microsoft.com/office/drawing/2014/main" id="{DB788D4D-D082-48BF-85C5-1F28CAE1AA54}"/>
+                <a16:creationId xmlns:a16="http://schemas.microsoft.com/office/drawing/2014/main" id="{6FE3839B-D9F9-4206-B1FF-99E26E57576E}"/>
               </a:ext>
             </a:extLst>
           </p:cNvPr>
@@ -10063,7 +10071,7 @@
           <p:cNvPr id="2" name="">
             <a:extLst xmlns:a="http://schemas.openxmlformats.org/drawingml/2006/main">
               <a:ext uri="{FF2B5EF4-FFF2-40B4-BE49-F238E27FC236}">
-                <a16:creationId xmlns:a16="http://schemas.microsoft.com/office/drawing/2014/main" id="{8324E3B5-8ADF-47ED-A1AD-D9811B54DCBD}"/>
+                <a16:creationId xmlns:a16="http://schemas.microsoft.com/office/drawing/2014/main" id="{8B4898B7-6A8E-4DA9-97FF-66F11B5E5378}"/>
               </a:ext>
             </a:extLst>
           </p:cNvPr>
@@ -10120,7 +10128,7 @@
           <p:cNvPr id="3" name="">
             <a:extLst xmlns:a="http://schemas.openxmlformats.org/drawingml/2006/main">
               <a:ext uri="{FF2B5EF4-FFF2-40B4-BE49-F238E27FC236}">
-                <a16:creationId xmlns:a16="http://schemas.microsoft.com/office/drawing/2014/main" id="{869E633F-B08F-48B2-9237-813EC3ED8BC2}"/>
+                <a16:creationId xmlns:a16="http://schemas.microsoft.com/office/drawing/2014/main" id="{A7AF4344-25FA-4A7C-9CEF-9BB7DE0D9B76}"/>
               </a:ext>
             </a:extLst>
           </p:cNvPr>
@@ -10152,7 +10160,7 @@
           <p:cNvPr id="4" name="">
             <a:extLst xmlns:a="http://schemas.openxmlformats.org/drawingml/2006/main">
               <a:ext uri="{FF2B5EF4-FFF2-40B4-BE49-F238E27FC236}">
-                <a16:creationId xmlns:a16="http://schemas.microsoft.com/office/drawing/2014/main" id="{3EA530CB-C8D1-42F4-9FA6-0F86D8619188}"/>
+                <a16:creationId xmlns:a16="http://schemas.microsoft.com/office/drawing/2014/main" id="{D7A6DC40-6716-4170-BEDE-2D88ACE7B599}"/>
               </a:ext>
             </a:extLst>
           </p:cNvPr>
@@ -10209,7 +10217,7 @@
           <p:cNvPr id="5" name="">
             <a:extLst xmlns:a="http://schemas.openxmlformats.org/drawingml/2006/main">
               <a:ext uri="{FF2B5EF4-FFF2-40B4-BE49-F238E27FC236}">
-                <a16:creationId xmlns:a16="http://schemas.microsoft.com/office/drawing/2014/main" id="{D92B1138-5CB0-4DD3-A2FE-97660C706244}"/>
+                <a16:creationId xmlns:a16="http://schemas.microsoft.com/office/drawing/2014/main" id="{6BD0375B-1002-4FC5-9E52-87E7569A2C12}"/>
               </a:ext>
             </a:extLst>
           </p:cNvPr>
@@ -10266,7 +10274,7 @@
           <p:cNvPr id="6" name="">
             <a:extLst xmlns:a="http://schemas.openxmlformats.org/drawingml/2006/main">
               <a:ext uri="{FF2B5EF4-FFF2-40B4-BE49-F238E27FC236}">
-                <a16:creationId xmlns:a16="http://schemas.microsoft.com/office/drawing/2014/main" id="{7F780407-CA88-40BA-9E32-0D7A9CABA24F}"/>
+                <a16:creationId xmlns:a16="http://schemas.microsoft.com/office/drawing/2014/main" id="{3F5D0143-9FB1-4148-8A75-80B01FFAB559}"/>
               </a:ext>
             </a:extLst>
           </p:cNvPr>
@@ -10323,7 +10331,7 @@
           <p:cNvPr id="7" name="">
             <a:extLst xmlns:a="http://schemas.openxmlformats.org/drawingml/2006/main">
               <a:ext uri="{FF2B5EF4-FFF2-40B4-BE49-F238E27FC236}">
-                <a16:creationId xmlns:a16="http://schemas.microsoft.com/office/drawing/2014/main" id="{58F96E06-C0D2-4ADD-9922-6990F69E0C2F}"/>
+                <a16:creationId xmlns:a16="http://schemas.microsoft.com/office/drawing/2014/main" id="{8E6DD62E-431E-4953-AFFB-F92472F79AC7}"/>
               </a:ext>
             </a:extLst>
           </p:cNvPr>
@@ -10355,7 +10363,7 @@
           <p:cNvPr id="8" name="">
             <a:extLst xmlns:a="http://schemas.openxmlformats.org/drawingml/2006/main">
               <a:ext uri="{FF2B5EF4-FFF2-40B4-BE49-F238E27FC236}">
-                <a16:creationId xmlns:a16="http://schemas.microsoft.com/office/drawing/2014/main" id="{9D6A8726-C109-41A4-AB39-6D7EC0543024}"/>
+                <a16:creationId xmlns:a16="http://schemas.microsoft.com/office/drawing/2014/main" id="{C2BB0EC4-C833-410E-9B7B-8D2E21EF5816}"/>
               </a:ext>
             </a:extLst>
           </p:cNvPr>
@@ -10412,7 +10420,7 @@
           <p:cNvPr id="9" name="">
             <a:extLst xmlns:a="http://schemas.openxmlformats.org/drawingml/2006/main">
               <a:ext uri="{FF2B5EF4-FFF2-40B4-BE49-F238E27FC236}">
-                <a16:creationId xmlns:a16="http://schemas.microsoft.com/office/drawing/2014/main" id="{E5EF8D38-4760-4A39-A8D3-D84E6D70CA6A}"/>
+                <a16:creationId xmlns:a16="http://schemas.microsoft.com/office/drawing/2014/main" id="{9BF4FFA9-AAC6-4A9A-85BE-3AFB577AD935}"/>
               </a:ext>
             </a:extLst>
           </p:cNvPr>
@@ -10469,7 +10477,7 @@
           <p:cNvPr id="10" name="">
             <a:extLst xmlns:a="http://schemas.openxmlformats.org/drawingml/2006/main">
               <a:ext uri="{FF2B5EF4-FFF2-40B4-BE49-F238E27FC236}">
-                <a16:creationId xmlns:a16="http://schemas.microsoft.com/office/drawing/2014/main" id="{D5084064-45FD-449A-9322-8ACB88E92B95}"/>
+                <a16:creationId xmlns:a16="http://schemas.microsoft.com/office/drawing/2014/main" id="{173D1F34-0748-45F8-A5E5-20410ECCD026}"/>
               </a:ext>
             </a:extLst>
           </p:cNvPr>
@@ -10526,7 +10534,7 @@
           <p:cNvPr id="11" name="">
             <a:extLst xmlns:a="http://schemas.openxmlformats.org/drawingml/2006/main">
               <a:ext uri="{FF2B5EF4-FFF2-40B4-BE49-F238E27FC236}">
-                <a16:creationId xmlns:a16="http://schemas.microsoft.com/office/drawing/2014/main" id="{096481A1-1E9A-4579-82EA-BFF740E0A2C4}"/>
+                <a16:creationId xmlns:a16="http://schemas.microsoft.com/office/drawing/2014/main" id="{C42CE9FC-5251-4BF5-804C-D37662F0C843}"/>
               </a:ext>
             </a:extLst>
           </p:cNvPr>
@@ -10583,7 +10591,7 @@
           <p:cNvPr id="12" name="">
             <a:extLst xmlns:a="http://schemas.openxmlformats.org/drawingml/2006/main">
               <a:ext uri="{FF2B5EF4-FFF2-40B4-BE49-F238E27FC236}">
-                <a16:creationId xmlns:a16="http://schemas.microsoft.com/office/drawing/2014/main" id="{DE0FA8C3-2F2F-463D-B758-E86C420CE116}"/>
+                <a16:creationId xmlns:a16="http://schemas.microsoft.com/office/drawing/2014/main" id="{5C99B8B3-4F47-4396-B8A2-0690D10ED1FF}"/>
               </a:ext>
             </a:extLst>
           </p:cNvPr>
@@ -10640,7 +10648,7 @@
           <p:cNvPr id="13" name="">
             <a:extLst xmlns:a="http://schemas.openxmlformats.org/drawingml/2006/main">
               <a:ext uri="{FF2B5EF4-FFF2-40B4-BE49-F238E27FC236}">
-                <a16:creationId xmlns:a16="http://schemas.microsoft.com/office/drawing/2014/main" id="{E723BDC9-BC00-4F30-8ACE-54A4321CDC1A}"/>
+                <a16:creationId xmlns:a16="http://schemas.microsoft.com/office/drawing/2014/main" id="{5EAFBC82-C1C6-490E-AE51-067A58B56402}"/>
               </a:ext>
             </a:extLst>
           </p:cNvPr>
@@ -10697,7 +10705,7 @@
           <p:cNvPr id="14" name="">
             <a:extLst xmlns:a="http://schemas.openxmlformats.org/drawingml/2006/main">
               <a:ext uri="{FF2B5EF4-FFF2-40B4-BE49-F238E27FC236}">
-                <a16:creationId xmlns:a16="http://schemas.microsoft.com/office/drawing/2014/main" id="{FF5B7035-A2A6-4305-BC78-753C298B2D3C}"/>
+                <a16:creationId xmlns:a16="http://schemas.microsoft.com/office/drawing/2014/main" id="{25C15B94-C57B-4C88-9635-80B312C61D6E}"/>
               </a:ext>
             </a:extLst>
           </p:cNvPr>
@@ -10754,7 +10762,7 @@
           <p:cNvPr id="15" name="">
             <a:extLst xmlns:a="http://schemas.openxmlformats.org/drawingml/2006/main">
               <a:ext uri="{FF2B5EF4-FFF2-40B4-BE49-F238E27FC236}">
-                <a16:creationId xmlns:a16="http://schemas.microsoft.com/office/drawing/2014/main" id="{4F2A8CEB-A7CA-48AF-B699-78EBC66E01F6}"/>
+                <a16:creationId xmlns:a16="http://schemas.microsoft.com/office/drawing/2014/main" id="{957B74E7-67CB-4BE4-8DD1-CFF9839172CE}"/>
               </a:ext>
             </a:extLst>
           </p:cNvPr>
@@ -10809,7 +10817,7 @@
     </p:spTree>
     <p:extLst>
       <p:ext uri="{BB962C8B-B14F-4D97-AF65-F5344CB8AC3E}">
-        <p14:creationId xmlns:p14="http://schemas.microsoft.com/office/powerpoint/2010/main" val="1485371487"/>
+        <p14:creationId xmlns:p14="http://schemas.microsoft.com/office/powerpoint/2010/main" val="1009474047"/>
       </p:ext>
     </p:extLst>
   </p:cSld>
@@ -10964,7 +10972,7 @@
           <p:cNvPr id="16" name="">
             <a:extLst xmlns:a="http://schemas.openxmlformats.org/drawingml/2006/main">
               <a:ext uri="{FF2B5EF4-FFF2-40B4-BE49-F238E27FC236}">
-                <a16:creationId xmlns:a16="http://schemas.microsoft.com/office/drawing/2014/main" id="{4545CDB9-955C-4C3F-879F-7CA113E1DF59}"/>
+                <a16:creationId xmlns:a16="http://schemas.microsoft.com/office/drawing/2014/main" id="{88B6D6A2-A138-481B-91E0-001950D1E3D6}"/>
               </a:ext>
             </a:extLst>
           </p:cNvPr>
@@ -10996,7 +11004,7 @@
           <p:cNvPr id="2" name="">
             <a:extLst xmlns:a="http://schemas.openxmlformats.org/drawingml/2006/main">
               <a:ext uri="{FF2B5EF4-FFF2-40B4-BE49-F238E27FC236}">
-                <a16:creationId xmlns:a16="http://schemas.microsoft.com/office/drawing/2014/main" id="{9A201FF3-2F36-4C1B-A140-4B06BBEFC32D}"/>
+                <a16:creationId xmlns:a16="http://schemas.microsoft.com/office/drawing/2014/main" id="{D3BD73C1-9A7B-4C69-A61B-ECC3B032DB13}"/>
               </a:ext>
             </a:extLst>
           </p:cNvPr>
@@ -11053,7 +11061,7 @@
           <p:cNvPr id="3" name="">
             <a:extLst xmlns:a="http://schemas.openxmlformats.org/drawingml/2006/main">
               <a:ext uri="{FF2B5EF4-FFF2-40B4-BE49-F238E27FC236}">
-                <a16:creationId xmlns:a16="http://schemas.microsoft.com/office/drawing/2014/main" id="{624B7E95-5483-4F2E-852F-996BF6319C73}"/>
+                <a16:creationId xmlns:a16="http://schemas.microsoft.com/office/drawing/2014/main" id="{8BE37FE4-CBAB-42FF-8A4E-F35C590DDC40}"/>
               </a:ext>
             </a:extLst>
           </p:cNvPr>
@@ -11085,7 +11093,7 @@
           <p:cNvPr id="4" name="">
             <a:extLst xmlns:a="http://schemas.openxmlformats.org/drawingml/2006/main">
               <a:ext uri="{FF2B5EF4-FFF2-40B4-BE49-F238E27FC236}">
-                <a16:creationId xmlns:a16="http://schemas.microsoft.com/office/drawing/2014/main" id="{7E606D82-8F07-4148-9FEB-0FC764810939}"/>
+                <a16:creationId xmlns:a16="http://schemas.microsoft.com/office/drawing/2014/main" id="{600F2964-FA83-48FF-88C3-499E2CF96C23}"/>
               </a:ext>
             </a:extLst>
           </p:cNvPr>
@@ -11142,7 +11150,7 @@
           <p:cNvPr id="5" name="">
             <a:extLst xmlns:a="http://schemas.openxmlformats.org/drawingml/2006/main">
               <a:ext uri="{FF2B5EF4-FFF2-40B4-BE49-F238E27FC236}">
-                <a16:creationId xmlns:a16="http://schemas.microsoft.com/office/drawing/2014/main" id="{D4F0E92D-98DD-4555-AD9C-95085AE38DAD}"/>
+                <a16:creationId xmlns:a16="http://schemas.microsoft.com/office/drawing/2014/main" id="{723197E6-7095-4B77-B2B2-651F1DD4F5E4}"/>
               </a:ext>
             </a:extLst>
           </p:cNvPr>
@@ -11199,7 +11207,7 @@
           <p:cNvPr id="6" name="">
             <a:extLst xmlns:a="http://schemas.openxmlformats.org/drawingml/2006/main">
               <a:ext uri="{FF2B5EF4-FFF2-40B4-BE49-F238E27FC236}">
-                <a16:creationId xmlns:a16="http://schemas.microsoft.com/office/drawing/2014/main" id="{B0F987BF-4474-4CD9-9C87-B52E0F09ECF1}"/>
+                <a16:creationId xmlns:a16="http://schemas.microsoft.com/office/drawing/2014/main" id="{C7038BF6-AF84-4B95-BDE8-D0E72747F010}"/>
               </a:ext>
             </a:extLst>
           </p:cNvPr>
@@ -11256,7 +11264,7 @@
           <p:cNvPr id="7" name="">
             <a:extLst xmlns:a="http://schemas.openxmlformats.org/drawingml/2006/main">
               <a:ext uri="{FF2B5EF4-FFF2-40B4-BE49-F238E27FC236}">
-                <a16:creationId xmlns:a16="http://schemas.microsoft.com/office/drawing/2014/main" id="{D370C1B1-7464-4399-BD53-C733C3C26BEF}"/>
+                <a16:creationId xmlns:a16="http://schemas.microsoft.com/office/drawing/2014/main" id="{0C6B4656-E507-41F9-A5A6-069A2F7F3DF1}"/>
               </a:ext>
             </a:extLst>
           </p:cNvPr>
@@ -11288,7 +11296,7 @@
           <p:cNvPr id="8" name="">
             <a:extLst xmlns:a="http://schemas.openxmlformats.org/drawingml/2006/main">
               <a:ext uri="{FF2B5EF4-FFF2-40B4-BE49-F238E27FC236}">
-                <a16:creationId xmlns:a16="http://schemas.microsoft.com/office/drawing/2014/main" id="{D102CBB4-08AE-4285-9C34-0A8BFD116AF5}"/>
+                <a16:creationId xmlns:a16="http://schemas.microsoft.com/office/drawing/2014/main" id="{E91B3F66-C1F8-4A6A-B84C-319D3C4EE7BB}"/>
               </a:ext>
             </a:extLst>
           </p:cNvPr>
@@ -11345,7 +11353,7 @@
           <p:cNvPr id="9" name="">
             <a:extLst xmlns:a="http://schemas.openxmlformats.org/drawingml/2006/main">
               <a:ext uri="{FF2B5EF4-FFF2-40B4-BE49-F238E27FC236}">
-                <a16:creationId xmlns:a16="http://schemas.microsoft.com/office/drawing/2014/main" id="{36EE1FA5-B48E-4F43-815E-A49FC2A68DC9}"/>
+                <a16:creationId xmlns:a16="http://schemas.microsoft.com/office/drawing/2014/main" id="{56A06816-4E5C-42AB-BD25-935C80763353}"/>
               </a:ext>
             </a:extLst>
           </p:cNvPr>
@@ -11406,7 +11414,7 @@
           <p:nvPr/>
         </p:nvPicPr>
         <p:blipFill>
-          <a:blip xmlns:r="http://schemas.openxmlformats.org/officeDocument/2006/relationships" xmlns:a="http://schemas.openxmlformats.org/drawingml/2006/main" r:embed="Rf14f0fdd5f6344a6"/>
+          <a:blip xmlns:r="http://schemas.openxmlformats.org/officeDocument/2006/relationships" xmlns:a="http://schemas.openxmlformats.org/drawingml/2006/main" r:embed="R13fcd446ee1f4f3c"/>
           <a:stretch xmlns:a="http://schemas.openxmlformats.org/drawingml/2006/main"/>
         </p:blipFill>
         <p:spPr>
@@ -11424,7 +11432,7 @@
           <p:cNvPr id="11" name="">
             <a:extLst xmlns:a="http://schemas.openxmlformats.org/drawingml/2006/main">
               <a:ext uri="{FF2B5EF4-FFF2-40B4-BE49-F238E27FC236}">
-                <a16:creationId xmlns:a16="http://schemas.microsoft.com/office/drawing/2014/main" id="{37F3B75C-3C12-4EE5-9919-4DBD8639FE21}"/>
+                <a16:creationId xmlns:a16="http://schemas.microsoft.com/office/drawing/2014/main" id="{090FEC12-FACB-4F82-B2EA-6BA5A6DC7317}"/>
               </a:ext>
             </a:extLst>
           </p:cNvPr>
@@ -11481,7 +11489,7 @@
           <p:cNvPr id="12" name="">
             <a:extLst xmlns:a="http://schemas.openxmlformats.org/drawingml/2006/main">
               <a:ext uri="{FF2B5EF4-FFF2-40B4-BE49-F238E27FC236}">
-                <a16:creationId xmlns:a16="http://schemas.microsoft.com/office/drawing/2014/main" id="{96D52AA5-0DB7-4C3E-A598-54EE7E5298A9}"/>
+                <a16:creationId xmlns:a16="http://schemas.microsoft.com/office/drawing/2014/main" id="{08784EEE-6F95-43E7-A7C1-3F68099674CB}"/>
               </a:ext>
             </a:extLst>
           </p:cNvPr>
@@ -11538,7 +11546,7 @@
           <p:cNvPr id="13" name="">
             <a:extLst xmlns:a="http://schemas.openxmlformats.org/drawingml/2006/main">
               <a:ext uri="{FF2B5EF4-FFF2-40B4-BE49-F238E27FC236}">
-                <a16:creationId xmlns:a16="http://schemas.microsoft.com/office/drawing/2014/main" id="{28E74402-EEB0-436A-B30D-4BE5BF1A0369}"/>
+                <a16:creationId xmlns:a16="http://schemas.microsoft.com/office/drawing/2014/main" id="{1786057F-B7F2-45A2-813D-FD528AE3BD78}"/>
               </a:ext>
             </a:extLst>
           </p:cNvPr>
@@ -11570,7 +11578,7 @@
           <p:cNvPr id="14" name="">
             <a:extLst xmlns:a="http://schemas.openxmlformats.org/drawingml/2006/main">
               <a:ext uri="{FF2B5EF4-FFF2-40B4-BE49-F238E27FC236}">
-                <a16:creationId xmlns:a16="http://schemas.microsoft.com/office/drawing/2014/main" id="{A7977A24-3C4B-4DF0-90CC-17FA91A4C036}"/>
+                <a16:creationId xmlns:a16="http://schemas.microsoft.com/office/drawing/2014/main" id="{CE9B0C01-6A9F-48B4-9845-6298A99E6F47}"/>
               </a:ext>
             </a:extLst>
           </p:cNvPr>
@@ -11627,7 +11635,7 @@
           <p:cNvPr id="15" name="">
             <a:extLst xmlns:a="http://schemas.openxmlformats.org/drawingml/2006/main">
               <a:ext uri="{FF2B5EF4-FFF2-40B4-BE49-F238E27FC236}">
-                <a16:creationId xmlns:a16="http://schemas.microsoft.com/office/drawing/2014/main" id="{2429D503-065B-4D5D-B0A9-AFE5517DEC43}"/>
+                <a16:creationId xmlns:a16="http://schemas.microsoft.com/office/drawing/2014/main" id="{526B7941-A6F0-4A94-9BC8-AE42F175469A}"/>
               </a:ext>
             </a:extLst>
           </p:cNvPr>
@@ -11682,7 +11690,7 @@
     </p:spTree>
     <p:extLst>
       <p:ext uri="{BB962C8B-B14F-4D97-AF65-F5344CB8AC3E}">
-        <p14:creationId xmlns:p14="http://schemas.microsoft.com/office/powerpoint/2010/main" val="1449111426"/>
+        <p14:creationId xmlns:p14="http://schemas.microsoft.com/office/powerpoint/2010/main" val="2128779577"/>
       </p:ext>
     </p:extLst>
   </p:cSld>
@@ -11837,7 +11845,7 @@
           <p:cNvPr id="23" name="">
             <a:extLst xmlns:a="http://schemas.openxmlformats.org/drawingml/2006/main">
               <a:ext uri="{FF2B5EF4-FFF2-40B4-BE49-F238E27FC236}">
-                <a16:creationId xmlns:a16="http://schemas.microsoft.com/office/drawing/2014/main" id="{0215E89E-7629-406A-94C7-BCA9AF1767EC}"/>
+                <a16:creationId xmlns:a16="http://schemas.microsoft.com/office/drawing/2014/main" id="{54DA6829-B3A7-44D3-B1E6-BF59861E312A}"/>
               </a:ext>
             </a:extLst>
           </p:cNvPr>
@@ -11869,7 +11877,7 @@
           <p:cNvPr id="2" name="">
             <a:extLst xmlns:a="http://schemas.openxmlformats.org/drawingml/2006/main">
               <a:ext uri="{FF2B5EF4-FFF2-40B4-BE49-F238E27FC236}">
-                <a16:creationId xmlns:a16="http://schemas.microsoft.com/office/drawing/2014/main" id="{0149051D-AB0F-481F-BF36-386CAEE2D158}"/>
+                <a16:creationId xmlns:a16="http://schemas.microsoft.com/office/drawing/2014/main" id="{369B0F1C-5789-456E-8918-B7B3E82F75AD}"/>
               </a:ext>
             </a:extLst>
           </p:cNvPr>
@@ -11926,7 +11934,7 @@
           <p:cNvPr id="3" name="">
             <a:extLst xmlns:a="http://schemas.openxmlformats.org/drawingml/2006/main">
               <a:ext uri="{FF2B5EF4-FFF2-40B4-BE49-F238E27FC236}">
-                <a16:creationId xmlns:a16="http://schemas.microsoft.com/office/drawing/2014/main" id="{98C64F4B-0E6F-4E1E-96E5-6BFB91E56311}"/>
+                <a16:creationId xmlns:a16="http://schemas.microsoft.com/office/drawing/2014/main" id="{75AEFE14-38FF-4178-9658-AF9B1DCFDCF5}"/>
               </a:ext>
             </a:extLst>
           </p:cNvPr>
@@ -11958,7 +11966,7 @@
           <p:cNvPr id="4" name="">
             <a:extLst xmlns:a="http://schemas.openxmlformats.org/drawingml/2006/main">
               <a:ext uri="{FF2B5EF4-FFF2-40B4-BE49-F238E27FC236}">
-                <a16:creationId xmlns:a16="http://schemas.microsoft.com/office/drawing/2014/main" id="{ED23A15C-9FC2-4B99-9BAC-BAC216E4724A}"/>
+                <a16:creationId xmlns:a16="http://schemas.microsoft.com/office/drawing/2014/main" id="{3D446C7A-E0F5-4D9B-802C-B6C6175BF4F1}"/>
               </a:ext>
             </a:extLst>
           </p:cNvPr>
@@ -12015,7 +12023,7 @@
           <p:cNvPr id="5" name="">
             <a:extLst xmlns:a="http://schemas.openxmlformats.org/drawingml/2006/main">
               <a:ext uri="{FF2B5EF4-FFF2-40B4-BE49-F238E27FC236}">
-                <a16:creationId xmlns:a16="http://schemas.microsoft.com/office/drawing/2014/main" id="{1F3A46CC-C8CD-4A32-B8D3-EBCB3DDF722E}"/>
+                <a16:creationId xmlns:a16="http://schemas.microsoft.com/office/drawing/2014/main" id="{7B3DCC83-BC48-451D-A50F-7DAD64B5E008}"/>
               </a:ext>
             </a:extLst>
           </p:cNvPr>
@@ -12072,7 +12080,7 @@
           <p:cNvPr id="6" name="">
             <a:extLst xmlns:a="http://schemas.openxmlformats.org/drawingml/2006/main">
               <a:ext uri="{FF2B5EF4-FFF2-40B4-BE49-F238E27FC236}">
-                <a16:creationId xmlns:a16="http://schemas.microsoft.com/office/drawing/2014/main" id="{4CFEB22B-9E85-4C0B-94E7-38DFFED05C72}"/>
+                <a16:creationId xmlns:a16="http://schemas.microsoft.com/office/drawing/2014/main" id="{E60DDCAB-C4F5-4399-92B2-63F947F223E3}"/>
               </a:ext>
             </a:extLst>
           </p:cNvPr>
@@ -12129,7 +12137,7 @@
           <p:cNvPr id="7" name="">
             <a:extLst xmlns:a="http://schemas.openxmlformats.org/drawingml/2006/main">
               <a:ext uri="{FF2B5EF4-FFF2-40B4-BE49-F238E27FC236}">
-                <a16:creationId xmlns:a16="http://schemas.microsoft.com/office/drawing/2014/main" id="{D8939B31-2A38-4983-9F4A-34EA01A54422}"/>
+                <a16:creationId xmlns:a16="http://schemas.microsoft.com/office/drawing/2014/main" id="{E4D855DD-3243-45FD-B566-F8846A890242}"/>
               </a:ext>
             </a:extLst>
           </p:cNvPr>
@@ -12161,7 +12169,7 @@
           <p:cNvPr id="8" name="">
             <a:extLst xmlns:a="http://schemas.openxmlformats.org/drawingml/2006/main">
               <a:ext uri="{FF2B5EF4-FFF2-40B4-BE49-F238E27FC236}">
-                <a16:creationId xmlns:a16="http://schemas.microsoft.com/office/drawing/2014/main" id="{D9C78673-0116-46BC-AC34-0A80E2C790E3}"/>
+                <a16:creationId xmlns:a16="http://schemas.microsoft.com/office/drawing/2014/main" id="{F1CDFEC2-702C-4034-B381-F80281BE9DBE}"/>
               </a:ext>
             </a:extLst>
           </p:cNvPr>
@@ -12218,7 +12226,7 @@
           <p:cNvPr id="9" name="">
             <a:extLst xmlns:a="http://schemas.openxmlformats.org/drawingml/2006/main">
               <a:ext uri="{FF2B5EF4-FFF2-40B4-BE49-F238E27FC236}">
-                <a16:creationId xmlns:a16="http://schemas.microsoft.com/office/drawing/2014/main" id="{95257B24-7E91-459A-AC9F-A390BE0987B0}"/>
+                <a16:creationId xmlns:a16="http://schemas.microsoft.com/office/drawing/2014/main" id="{8503AD8F-DE9B-4D9C-8A7D-CB4F3CADAEBD}"/>
               </a:ext>
             </a:extLst>
           </p:cNvPr>
@@ -12275,7 +12283,7 @@
           <p:cNvPr id="10" name="">
             <a:extLst xmlns:a="http://schemas.openxmlformats.org/drawingml/2006/main">
               <a:ext uri="{FF2B5EF4-FFF2-40B4-BE49-F238E27FC236}">
-                <a16:creationId xmlns:a16="http://schemas.microsoft.com/office/drawing/2014/main" id="{3BA918D2-3005-44E6-843D-344BEB8A81FB}"/>
+                <a16:creationId xmlns:a16="http://schemas.microsoft.com/office/drawing/2014/main" id="{3EF48402-A771-4C97-B421-957D2B11A2CD}"/>
               </a:ext>
             </a:extLst>
           </p:cNvPr>
@@ -12309,7 +12317,7 @@
           <p:cNvPr id="11" name="">
             <a:extLst xmlns:a="http://schemas.openxmlformats.org/drawingml/2006/main">
               <a:ext uri="{FF2B5EF4-FFF2-40B4-BE49-F238E27FC236}">
-                <a16:creationId xmlns:a16="http://schemas.microsoft.com/office/drawing/2014/main" id="{573627AE-A77F-456D-BE15-B961DF54B513}"/>
+                <a16:creationId xmlns:a16="http://schemas.microsoft.com/office/drawing/2014/main" id="{C70CC09F-0EEC-4DA2-BC68-29E1D995C035}"/>
               </a:ext>
             </a:extLst>
           </p:cNvPr>
@@ -12341,7 +12349,7 @@
           <p:cNvPr id="12" name="">
             <a:extLst xmlns:a="http://schemas.openxmlformats.org/drawingml/2006/main">
               <a:ext uri="{FF2B5EF4-FFF2-40B4-BE49-F238E27FC236}">
-                <a16:creationId xmlns:a16="http://schemas.microsoft.com/office/drawing/2014/main" id="{EC420C31-D55E-4E62-A536-B40805EF6DEF}"/>
+                <a16:creationId xmlns:a16="http://schemas.microsoft.com/office/drawing/2014/main" id="{E9B9C0BD-E604-4E60-9D1C-B7EAE40B3121}"/>
               </a:ext>
             </a:extLst>
           </p:cNvPr>
@@ -12398,7 +12406,7 @@
           <p:cNvPr id="13" name="">
             <a:extLst xmlns:a="http://schemas.openxmlformats.org/drawingml/2006/main">
               <a:ext uri="{FF2B5EF4-FFF2-40B4-BE49-F238E27FC236}">
-                <a16:creationId xmlns:a16="http://schemas.microsoft.com/office/drawing/2014/main" id="{D8E1D64E-F88E-49FD-A220-285497518958}"/>
+                <a16:creationId xmlns:a16="http://schemas.microsoft.com/office/drawing/2014/main" id="{3B8EDB1B-5385-45D9-BECF-D6338AE1DDD4}"/>
               </a:ext>
             </a:extLst>
           </p:cNvPr>
@@ -12455,7 +12463,7 @@
           <p:cNvPr id="14" name="">
             <a:extLst xmlns:a="http://schemas.openxmlformats.org/drawingml/2006/main">
               <a:ext uri="{FF2B5EF4-FFF2-40B4-BE49-F238E27FC236}">
-                <a16:creationId xmlns:a16="http://schemas.microsoft.com/office/drawing/2014/main" id="{956F31E6-4785-4166-902B-14ED99A09531}"/>
+                <a16:creationId xmlns:a16="http://schemas.microsoft.com/office/drawing/2014/main" id="{08F31C24-E1A4-4DE6-BF0E-90B03BABD742}"/>
               </a:ext>
             </a:extLst>
           </p:cNvPr>
@@ -12489,7 +12497,7 @@
           <p:cNvPr id="15" name="">
             <a:extLst xmlns:a="http://schemas.openxmlformats.org/drawingml/2006/main">
               <a:ext uri="{FF2B5EF4-FFF2-40B4-BE49-F238E27FC236}">
-                <a16:creationId xmlns:a16="http://schemas.microsoft.com/office/drawing/2014/main" id="{86D732B5-9702-4BEA-8E6E-3E5BB850A4DD}"/>
+                <a16:creationId xmlns:a16="http://schemas.microsoft.com/office/drawing/2014/main" id="{85CB8196-B593-472F-B9F0-09E780115002}"/>
               </a:ext>
             </a:extLst>
           </p:cNvPr>
@@ -12521,7 +12529,7 @@
           <p:cNvPr id="16" name="">
             <a:extLst xmlns:a="http://schemas.openxmlformats.org/drawingml/2006/main">
               <a:ext uri="{FF2B5EF4-FFF2-40B4-BE49-F238E27FC236}">
-                <a16:creationId xmlns:a16="http://schemas.microsoft.com/office/drawing/2014/main" id="{FB0381BF-77E1-43AA-AFB0-F82FBF19AEA4}"/>
+                <a16:creationId xmlns:a16="http://schemas.microsoft.com/office/drawing/2014/main" id="{5DAB1E8C-44A0-4F34-ACC2-17AA0C23C2E2}"/>
               </a:ext>
             </a:extLst>
           </p:cNvPr>
@@ -12578,7 +12586,7 @@
           <p:cNvPr id="17" name="">
             <a:extLst xmlns:a="http://schemas.openxmlformats.org/drawingml/2006/main">
               <a:ext uri="{FF2B5EF4-FFF2-40B4-BE49-F238E27FC236}">
-                <a16:creationId xmlns:a16="http://schemas.microsoft.com/office/drawing/2014/main" id="{1F8F3C74-E9F9-4BDC-BBA6-9C19BA84A911}"/>
+                <a16:creationId xmlns:a16="http://schemas.microsoft.com/office/drawing/2014/main" id="{E5508E94-13BF-4128-BEAE-319866C22943}"/>
               </a:ext>
             </a:extLst>
           </p:cNvPr>
@@ -12635,7 +12643,7 @@
           <p:cNvPr id="18" name="">
             <a:extLst xmlns:a="http://schemas.openxmlformats.org/drawingml/2006/main">
               <a:ext uri="{FF2B5EF4-FFF2-40B4-BE49-F238E27FC236}">
-                <a16:creationId xmlns:a16="http://schemas.microsoft.com/office/drawing/2014/main" id="{BB627F44-9975-4494-8D37-2FCDA030F30A}"/>
+                <a16:creationId xmlns:a16="http://schemas.microsoft.com/office/drawing/2014/main" id="{959EDDAF-6F34-4493-85A5-DE23D1810F31}"/>
               </a:ext>
             </a:extLst>
           </p:cNvPr>
@@ -12669,7 +12677,7 @@
           <p:cNvPr id="19" name="">
             <a:extLst xmlns:a="http://schemas.openxmlformats.org/drawingml/2006/main">
               <a:ext uri="{FF2B5EF4-FFF2-40B4-BE49-F238E27FC236}">
-                <a16:creationId xmlns:a16="http://schemas.microsoft.com/office/drawing/2014/main" id="{CE43C505-CCA1-4B4C-840B-27389CCB44BF}"/>
+                <a16:creationId xmlns:a16="http://schemas.microsoft.com/office/drawing/2014/main" id="{95CFFAAB-F834-42B3-8B60-60D00F781F7B}"/>
               </a:ext>
             </a:extLst>
           </p:cNvPr>
@@ -12701,7 +12709,7 @@
           <p:cNvPr id="20" name="">
             <a:extLst xmlns:a="http://schemas.openxmlformats.org/drawingml/2006/main">
               <a:ext uri="{FF2B5EF4-FFF2-40B4-BE49-F238E27FC236}">
-                <a16:creationId xmlns:a16="http://schemas.microsoft.com/office/drawing/2014/main" id="{F499254B-F29D-4908-81F4-1878AB218FFB}"/>
+                <a16:creationId xmlns:a16="http://schemas.microsoft.com/office/drawing/2014/main" id="{EF849C99-47AC-4111-B725-30B75BDCB30E}"/>
               </a:ext>
             </a:extLst>
           </p:cNvPr>
@@ -12758,7 +12766,7 @@
           <p:cNvPr id="21" name="">
             <a:extLst xmlns:a="http://schemas.openxmlformats.org/drawingml/2006/main">
               <a:ext uri="{FF2B5EF4-FFF2-40B4-BE49-F238E27FC236}">
-                <a16:creationId xmlns:a16="http://schemas.microsoft.com/office/drawing/2014/main" id="{E29B1B62-9E7B-43DC-98D1-2F166513CADC}"/>
+                <a16:creationId xmlns:a16="http://schemas.microsoft.com/office/drawing/2014/main" id="{C29C0D12-223E-4D07-9764-35D6B24DDAF6}"/>
               </a:ext>
             </a:extLst>
           </p:cNvPr>
@@ -12815,7 +12823,7 @@
           <p:cNvPr id="22" name="">
             <a:extLst xmlns:a="http://schemas.openxmlformats.org/drawingml/2006/main">
               <a:ext uri="{FF2B5EF4-FFF2-40B4-BE49-F238E27FC236}">
-                <a16:creationId xmlns:a16="http://schemas.microsoft.com/office/drawing/2014/main" id="{30ADA8A0-F923-4D66-87FC-DDFFD1DD4229}"/>
+                <a16:creationId xmlns:a16="http://schemas.microsoft.com/office/drawing/2014/main" id="{8A8618F3-8170-4871-8735-A1DF624580EB}"/>
               </a:ext>
             </a:extLst>
           </p:cNvPr>
@@ -12870,7 +12878,7 @@
     </p:spTree>
     <p:extLst>
       <p:ext uri="{BB962C8B-B14F-4D97-AF65-F5344CB8AC3E}">
-        <p14:creationId xmlns:p14="http://schemas.microsoft.com/office/powerpoint/2010/main" val="683276876"/>
+        <p14:creationId xmlns:p14="http://schemas.microsoft.com/office/powerpoint/2010/main" val="463224498"/>
       </p:ext>
     </p:extLst>
   </p:cSld>
@@ -13071,7 +13079,7 @@
           <p:cNvPr id="22" name="">
             <a:extLst xmlns:a="http://schemas.openxmlformats.org/drawingml/2006/main">
               <a:ext uri="{FF2B5EF4-FFF2-40B4-BE49-F238E27FC236}">
-                <a16:creationId xmlns:a16="http://schemas.microsoft.com/office/drawing/2014/main" id="{A0BDFD2C-C162-48E2-A477-CA8150323A72}"/>
+                <a16:creationId xmlns:a16="http://schemas.microsoft.com/office/drawing/2014/main" id="{537EC26B-0EA9-45D8-867B-080239EB31BD}"/>
               </a:ext>
             </a:extLst>
           </p:cNvPr>
@@ -13103,7 +13111,7 @@
           <p:cNvPr id="2" name="">
             <a:extLst xmlns:a="http://schemas.openxmlformats.org/drawingml/2006/main">
               <a:ext uri="{FF2B5EF4-FFF2-40B4-BE49-F238E27FC236}">
-                <a16:creationId xmlns:a16="http://schemas.microsoft.com/office/drawing/2014/main" id="{3E906001-B737-4206-B9D6-7DDBDA0C02CE}"/>
+                <a16:creationId xmlns:a16="http://schemas.microsoft.com/office/drawing/2014/main" id="{FBB6636A-4912-4C4D-A43A-17BF56187E31}"/>
               </a:ext>
             </a:extLst>
           </p:cNvPr>
@@ -13160,7 +13168,7 @@
           <p:cNvPr id="3" name="">
             <a:extLst xmlns:a="http://schemas.openxmlformats.org/drawingml/2006/main">
               <a:ext uri="{FF2B5EF4-FFF2-40B4-BE49-F238E27FC236}">
-                <a16:creationId xmlns:a16="http://schemas.microsoft.com/office/drawing/2014/main" id="{FD10B98B-55F1-4B4F-9AB5-0E26C26B36DE}"/>
+                <a16:creationId xmlns:a16="http://schemas.microsoft.com/office/drawing/2014/main" id="{C4170A42-72FB-40AF-A387-11EB5F26C3F8}"/>
               </a:ext>
             </a:extLst>
           </p:cNvPr>
@@ -13192,7 +13200,7 @@
           <p:cNvPr id="4" name="">
             <a:extLst xmlns:a="http://schemas.openxmlformats.org/drawingml/2006/main">
               <a:ext uri="{FF2B5EF4-FFF2-40B4-BE49-F238E27FC236}">
-                <a16:creationId xmlns:a16="http://schemas.microsoft.com/office/drawing/2014/main" id="{D56C6169-CAE9-4F07-8A95-FDEA3F0F1D56}"/>
+                <a16:creationId xmlns:a16="http://schemas.microsoft.com/office/drawing/2014/main" id="{27959528-1212-4CB9-BD84-092149235F49}"/>
               </a:ext>
             </a:extLst>
           </p:cNvPr>
@@ -13249,7 +13257,7 @@
           <p:cNvPr id="5" name="">
             <a:extLst xmlns:a="http://schemas.openxmlformats.org/drawingml/2006/main">
               <a:ext uri="{FF2B5EF4-FFF2-40B4-BE49-F238E27FC236}">
-                <a16:creationId xmlns:a16="http://schemas.microsoft.com/office/drawing/2014/main" id="{D15367F0-16AC-4CC8-8359-3369681F0B28}"/>
+                <a16:creationId xmlns:a16="http://schemas.microsoft.com/office/drawing/2014/main" id="{F87F7C0A-4DBE-4D32-BF00-EDB9D7A61AE5}"/>
               </a:ext>
             </a:extLst>
           </p:cNvPr>
@@ -13306,7 +13314,7 @@
           <p:cNvPr id="6" name="">
             <a:extLst xmlns:a="http://schemas.openxmlformats.org/drawingml/2006/main">
               <a:ext uri="{FF2B5EF4-FFF2-40B4-BE49-F238E27FC236}">
-                <a16:creationId xmlns:a16="http://schemas.microsoft.com/office/drawing/2014/main" id="{884FC84F-5017-4647-9245-759DC98D109A}"/>
+                <a16:creationId xmlns:a16="http://schemas.microsoft.com/office/drawing/2014/main" id="{B5E8CAA3-4979-4363-B1C1-1F4C47B66679}"/>
               </a:ext>
             </a:extLst>
           </p:cNvPr>
@@ -13363,7 +13371,7 @@
           <p:cNvPr id="7" name="">
             <a:extLst xmlns:a="http://schemas.openxmlformats.org/drawingml/2006/main">
               <a:ext uri="{FF2B5EF4-FFF2-40B4-BE49-F238E27FC236}">
-                <a16:creationId xmlns:a16="http://schemas.microsoft.com/office/drawing/2014/main" id="{51D03630-ADF1-4FFB-885D-12ACCA1B53FF}"/>
+                <a16:creationId xmlns:a16="http://schemas.microsoft.com/office/drawing/2014/main" id="{7F673A3E-2FB8-4BB6-8A4E-F75D528E2687}"/>
               </a:ext>
             </a:extLst>
           </p:cNvPr>
@@ -13395,7 +13403,7 @@
           <p:cNvPr id="8" name="">
             <a:extLst xmlns:a="http://schemas.openxmlformats.org/drawingml/2006/main">
               <a:ext uri="{FF2B5EF4-FFF2-40B4-BE49-F238E27FC236}">
-                <a16:creationId xmlns:a16="http://schemas.microsoft.com/office/drawing/2014/main" id="{9E6DC903-F26E-4816-ACFE-CA42671ED793}"/>
+                <a16:creationId xmlns:a16="http://schemas.microsoft.com/office/drawing/2014/main" id="{74F649CD-4464-4F6E-837A-555D15B44D5E}"/>
               </a:ext>
             </a:extLst>
           </p:cNvPr>
@@ -13452,7 +13460,7 @@
           <p:cNvPr id="9" name="">
             <a:extLst xmlns:a="http://schemas.openxmlformats.org/drawingml/2006/main">
               <a:ext uri="{FF2B5EF4-FFF2-40B4-BE49-F238E27FC236}">
-                <a16:creationId xmlns:a16="http://schemas.microsoft.com/office/drawing/2014/main" id="{382F7E55-A0F7-4D60-9379-101A30E3846B}"/>
+                <a16:creationId xmlns:a16="http://schemas.microsoft.com/office/drawing/2014/main" id="{7FB1A148-452E-4219-ACAA-C238F9CA3461}"/>
               </a:ext>
             </a:extLst>
           </p:cNvPr>
@@ -13509,7 +13517,7 @@
           <p:cNvPr id="10" name="">
             <a:extLst xmlns:a="http://schemas.openxmlformats.org/drawingml/2006/main">
               <a:ext uri="{FF2B5EF4-FFF2-40B4-BE49-F238E27FC236}">
-                <a16:creationId xmlns:a16="http://schemas.microsoft.com/office/drawing/2014/main" id="{B721F243-38DF-4FF4-8B79-DAA32746BEAF}"/>
+                <a16:creationId xmlns:a16="http://schemas.microsoft.com/office/drawing/2014/main" id="{7854A118-0D09-4128-B4A5-2D851B80B3A2}"/>
               </a:ext>
             </a:extLst>
           </p:cNvPr>
@@ -13543,7 +13551,7 @@
           <p:cNvPr id="11" name="">
             <a:extLst xmlns:a="http://schemas.openxmlformats.org/drawingml/2006/main">
               <a:ext uri="{FF2B5EF4-FFF2-40B4-BE49-F238E27FC236}">
-                <a16:creationId xmlns:a16="http://schemas.microsoft.com/office/drawing/2014/main" id="{993C70AD-23D3-4B95-BD33-6F5D39E547CA}"/>
+                <a16:creationId xmlns:a16="http://schemas.microsoft.com/office/drawing/2014/main" id="{9A91E6BD-247F-4D97-B56D-083E80AC62B6}"/>
               </a:ext>
             </a:extLst>
           </p:cNvPr>
@@ -13575,7 +13583,7 @@
           <p:cNvPr id="12" name="">
             <a:extLst xmlns:a="http://schemas.openxmlformats.org/drawingml/2006/main">
               <a:ext uri="{FF2B5EF4-FFF2-40B4-BE49-F238E27FC236}">
-                <a16:creationId xmlns:a16="http://schemas.microsoft.com/office/drawing/2014/main" id="{81BB2356-81AA-41C5-8063-7C509AB9C582}"/>
+                <a16:creationId xmlns:a16="http://schemas.microsoft.com/office/drawing/2014/main" id="{6F599C97-6100-4E22-839C-45978800E0EA}"/>
               </a:ext>
             </a:extLst>
           </p:cNvPr>
@@ -13632,7 +13640,7 @@
           <p:cNvPr id="13" name="">
             <a:extLst xmlns:a="http://schemas.openxmlformats.org/drawingml/2006/main">
               <a:ext uri="{FF2B5EF4-FFF2-40B4-BE49-F238E27FC236}">
-                <a16:creationId xmlns:a16="http://schemas.microsoft.com/office/drawing/2014/main" id="{97563D8B-9407-4A89-9605-908D6070B487}"/>
+                <a16:creationId xmlns:a16="http://schemas.microsoft.com/office/drawing/2014/main" id="{81D11E72-4063-40BC-A0C3-0A533ECCA81D}"/>
               </a:ext>
             </a:extLst>
           </p:cNvPr>
@@ -13689,7 +13697,7 @@
           <p:cNvPr id="14" name="">
             <a:extLst xmlns:a="http://schemas.openxmlformats.org/drawingml/2006/main">
               <a:ext uri="{FF2B5EF4-FFF2-40B4-BE49-F238E27FC236}">
-                <a16:creationId xmlns:a16="http://schemas.microsoft.com/office/drawing/2014/main" id="{EFA767EE-47B9-4E1C-93DE-6C3D4BC7F9A8}"/>
+                <a16:creationId xmlns:a16="http://schemas.microsoft.com/office/drawing/2014/main" id="{62EA7630-7B6D-485B-A586-49A4AD558D1A}"/>
               </a:ext>
             </a:extLst>
           </p:cNvPr>
@@ -13723,7 +13731,7 @@
           <p:cNvPr id="15" name="">
             <a:extLst xmlns:a="http://schemas.openxmlformats.org/drawingml/2006/main">
               <a:ext uri="{FF2B5EF4-FFF2-40B4-BE49-F238E27FC236}">
-                <a16:creationId xmlns:a16="http://schemas.microsoft.com/office/drawing/2014/main" id="{29CC98A9-FE83-454B-A6C2-FC9D0B4A83A9}"/>
+                <a16:creationId xmlns:a16="http://schemas.microsoft.com/office/drawing/2014/main" id="{5321B706-BC73-4BD2-9D3E-C5191B25A3FD}"/>
               </a:ext>
             </a:extLst>
           </p:cNvPr>
@@ -13755,7 +13763,7 @@
           <p:cNvPr id="16" name="">
             <a:extLst xmlns:a="http://schemas.openxmlformats.org/drawingml/2006/main">
               <a:ext uri="{FF2B5EF4-FFF2-40B4-BE49-F238E27FC236}">
-                <a16:creationId xmlns:a16="http://schemas.microsoft.com/office/drawing/2014/main" id="{E2BC465A-73D2-4B6D-8A67-82B5800BEDE9}"/>
+                <a16:creationId xmlns:a16="http://schemas.microsoft.com/office/drawing/2014/main" id="{F75834C2-E637-4D67-A3D0-0C780C9E8C4F}"/>
               </a:ext>
             </a:extLst>
           </p:cNvPr>
@@ -13812,7 +13820,7 @@
           <p:cNvPr id="17" name="">
             <a:extLst xmlns:a="http://schemas.openxmlformats.org/drawingml/2006/main">
               <a:ext uri="{FF2B5EF4-FFF2-40B4-BE49-F238E27FC236}">
-                <a16:creationId xmlns:a16="http://schemas.microsoft.com/office/drawing/2014/main" id="{18823CF8-F9E9-416A-AEC2-53325D6CD6A5}"/>
+                <a16:creationId xmlns:a16="http://schemas.microsoft.com/office/drawing/2014/main" id="{4FDC0F6E-8066-431C-9533-F245F557FE6F}"/>
               </a:ext>
             </a:extLst>
           </p:cNvPr>
@@ -13869,7 +13877,7 @@
           <p:cNvPr id="18" name="">
             <a:extLst xmlns:a="http://schemas.openxmlformats.org/drawingml/2006/main">
               <a:ext uri="{FF2B5EF4-FFF2-40B4-BE49-F238E27FC236}">
-                <a16:creationId xmlns:a16="http://schemas.microsoft.com/office/drawing/2014/main" id="{A3302126-4508-4DC2-A557-4149021CA468}"/>
+                <a16:creationId xmlns:a16="http://schemas.microsoft.com/office/drawing/2014/main" id="{C827328A-2160-4CD1-9ADE-9B2AF154114A}"/>
               </a:ext>
             </a:extLst>
           </p:cNvPr>
@@ -13903,7 +13911,7 @@
           <p:cNvPr id="19" name="">
             <a:extLst xmlns:a="http://schemas.openxmlformats.org/drawingml/2006/main">
               <a:ext uri="{FF2B5EF4-FFF2-40B4-BE49-F238E27FC236}">
-                <a16:creationId xmlns:a16="http://schemas.microsoft.com/office/drawing/2014/main" id="{10C3404D-71DB-4F80-A2F1-9D1FE33CD6F7}"/>
+                <a16:creationId xmlns:a16="http://schemas.microsoft.com/office/drawing/2014/main" id="{F26D8441-6AB0-4C8C-82A5-A5DC6C915393}"/>
               </a:ext>
             </a:extLst>
           </p:cNvPr>
@@ -13935,7 +13943,7 @@
           <p:cNvPr id="20" name="">
             <a:extLst xmlns:a="http://schemas.openxmlformats.org/drawingml/2006/main">
               <a:ext uri="{FF2B5EF4-FFF2-40B4-BE49-F238E27FC236}">
-                <a16:creationId xmlns:a16="http://schemas.microsoft.com/office/drawing/2014/main" id="{5E8C4BDD-28BB-4DAF-A18B-A78C1E00F761}"/>
+                <a16:creationId xmlns:a16="http://schemas.microsoft.com/office/drawing/2014/main" id="{607E98D1-E3C5-438B-AEB1-5BF06AE5CA7C}"/>
               </a:ext>
             </a:extLst>
           </p:cNvPr>
@@ -13992,7 +14000,7 @@
           <p:cNvPr id="21" name="">
             <a:extLst xmlns:a="http://schemas.openxmlformats.org/drawingml/2006/main">
               <a:ext uri="{FF2B5EF4-FFF2-40B4-BE49-F238E27FC236}">
-                <a16:creationId xmlns:a16="http://schemas.microsoft.com/office/drawing/2014/main" id="{99E77B59-89C9-4840-8990-D8B137A8CAD9}"/>
+                <a16:creationId xmlns:a16="http://schemas.microsoft.com/office/drawing/2014/main" id="{5B1C67B3-3AF9-412D-99B1-D161050C12FC}"/>
               </a:ext>
             </a:extLst>
           </p:cNvPr>
@@ -14047,7 +14055,7 @@
     </p:spTree>
     <p:extLst>
       <p:ext uri="{BB962C8B-B14F-4D97-AF65-F5344CB8AC3E}">
-        <p14:creationId xmlns:p14="http://schemas.microsoft.com/office/powerpoint/2010/main" val="52164091"/>
+        <p14:creationId xmlns:p14="http://schemas.microsoft.com/office/powerpoint/2010/main" val="41210574"/>
       </p:ext>
     </p:extLst>
   </p:cSld>
